--- a/EPS_I/ro/fisiere/C02.pptx
+++ b/EPS_I/ro/fisiere/C02.pptx
@@ -4639,6 +4639,10 @@
             <a:prstDash val="solid"/>
           </a:ln>
         </p:spPr>
+        <p:txBody>
+          <a:bodyPr/>
+          <a:p/>
+        </p:txBody>
       </p:sp>
       <p:sp>
         <p:nvSpPr>
@@ -4781,6 +4785,10 @@
             <a:prstDash val="solid"/>
           </a:ln>
         </p:spPr>
+        <p:txBody>
+          <a:bodyPr/>
+          <a:p/>
+        </p:txBody>
       </p:sp>
       <p:sp>
         <p:nvSpPr>
@@ -4884,6 +4892,10 @@
             <a:prstDash val="solid"/>
           </a:ln>
         </p:spPr>
+        <p:txBody>
+          <a:bodyPr/>
+          <a:p/>
+        </p:txBody>
       </p:sp>
       <p:sp>
         <p:nvSpPr>
@@ -4909,6 +4921,10 @@
             <a:prstDash val="solid"/>
           </a:ln>
         </p:spPr>
+        <p:txBody>
+          <a:bodyPr/>
+          <a:p/>
+        </p:txBody>
       </p:sp>
       <p:sp>
         <p:nvSpPr>
@@ -4934,6 +4950,10 @@
             <a:prstDash val="solid"/>
           </a:ln>
         </p:spPr>
+        <p:txBody>
+          <a:bodyPr/>
+          <a:p/>
+        </p:txBody>
       </p:sp>
       <p:sp>
         <p:nvSpPr>
@@ -4959,6 +4979,10 @@
             <a:prstDash val="solid"/>
           </a:ln>
         </p:spPr>
+        <p:txBody>
+          <a:bodyPr/>
+          <a:p/>
+        </p:txBody>
       </p:sp>
       <p:sp>
         <p:nvSpPr>
@@ -4984,6 +5008,10 @@
             <a:prstDash val="solid"/>
           </a:ln>
         </p:spPr>
+        <p:txBody>
+          <a:bodyPr/>
+          <a:p/>
+        </p:txBody>
       </p:sp>
       <p:sp>
         <p:nvSpPr>
@@ -5009,6 +5037,10 @@
             <a:prstDash val="solid"/>
           </a:ln>
         </p:spPr>
+        <p:txBody>
+          <a:bodyPr/>
+          <a:p/>
+        </p:txBody>
       </p:sp>
       <p:sp>
         <p:nvSpPr>
@@ -5034,6 +5066,10 @@
             <a:prstDash val="solid"/>
           </a:ln>
         </p:spPr>
+        <p:txBody>
+          <a:bodyPr/>
+          <a:p/>
+        </p:txBody>
       </p:sp>
       <p:sp>
         <p:nvSpPr>
@@ -5059,6 +5095,10 @@
             <a:prstDash val="solid"/>
           </a:ln>
         </p:spPr>
+        <p:txBody>
+          <a:bodyPr/>
+          <a:p/>
+        </p:txBody>
       </p:sp>
       <p:sp>
         <p:nvSpPr>
@@ -5084,6 +5124,10 @@
             <a:prstDash val="solid"/>
           </a:ln>
         </p:spPr>
+        <p:txBody>
+          <a:bodyPr/>
+          <a:p/>
+        </p:txBody>
       </p:sp>
       <p:sp>
         <p:nvSpPr>
@@ -5109,6 +5153,10 @@
             <a:prstDash val="solid"/>
           </a:ln>
         </p:spPr>
+        <p:txBody>
+          <a:bodyPr/>
+          <a:p/>
+        </p:txBody>
       </p:sp>
       <p:sp>
         <p:nvSpPr>
@@ -5134,6 +5182,10 @@
             <a:prstDash val="solid"/>
           </a:ln>
         </p:spPr>
+        <p:txBody>
+          <a:bodyPr/>
+          <a:p/>
+        </p:txBody>
       </p:sp>
       <p:sp>
         <p:nvSpPr>
@@ -5159,6 +5211,10 @@
             <a:prstDash val="solid"/>
           </a:ln>
         </p:spPr>
+        <p:txBody>
+          <a:bodyPr/>
+          <a:p/>
+        </p:txBody>
       </p:sp>
       <p:sp>
         <p:nvSpPr>
@@ -5184,6 +5240,10 @@
             <a:prstDash val="solid"/>
           </a:ln>
         </p:spPr>
+        <p:txBody>
+          <a:bodyPr/>
+          <a:p/>
+        </p:txBody>
       </p:sp>
       <p:sp>
         <p:nvSpPr>
@@ -5216,6 +5276,10 @@
             </a:outerShdw>
           </a:effectLst>
         </p:spPr>
+        <p:txBody>
+          <a:bodyPr/>
+          <a:p/>
+        </p:txBody>
       </p:sp>
       <p:sp>
         <p:nvSpPr>
@@ -5241,6 +5305,10 @@
             <a:prstDash val="solid"/>
           </a:ln>
         </p:spPr>
+        <p:txBody>
+          <a:bodyPr/>
+          <a:p/>
+        </p:txBody>
       </p:sp>
       <p:sp>
         <p:nvSpPr>
@@ -5266,6 +5334,10 @@
             <a:prstDash val="solid"/>
           </a:ln>
         </p:spPr>
+        <p:txBody>
+          <a:bodyPr/>
+          <a:p/>
+        </p:txBody>
       </p:sp>
       <p:sp>
         <p:nvSpPr>
@@ -5291,6 +5363,10 @@
             <a:prstDash val="solid"/>
           </a:ln>
         </p:spPr>
+        <p:txBody>
+          <a:bodyPr/>
+          <a:p/>
+        </p:txBody>
       </p:sp>
       <p:sp>
         <p:nvSpPr>
@@ -5316,6 +5392,10 @@
             <a:prstDash val="solid"/>
           </a:ln>
         </p:spPr>
+        <p:txBody>
+          <a:bodyPr/>
+          <a:p/>
+        </p:txBody>
       </p:sp>
       <p:sp>
         <p:nvSpPr>
@@ -5341,6 +5421,10 @@
             <a:prstDash val="solid"/>
           </a:ln>
         </p:spPr>
+        <p:txBody>
+          <a:bodyPr/>
+          <a:p/>
+        </p:txBody>
       </p:sp>
       <p:sp>
         <p:nvSpPr>
@@ -5366,6 +5450,10 @@
             <a:prstDash val="solid"/>
           </a:ln>
         </p:spPr>
+        <p:txBody>
+          <a:bodyPr/>
+          <a:p/>
+        </p:txBody>
       </p:sp>
     </p:spTree>
   </p:cSld>
@@ -5425,6 +5513,10 @@
             <a:prstDash val="solid"/>
           </a:ln>
         </p:spPr>
+        <p:txBody>
+          <a:bodyPr/>
+          <a:p/>
+        </p:txBody>
       </p:sp>
       <p:sp>
         <p:nvSpPr>
@@ -5569,6 +5661,10 @@
             <a:prstDash val="solid"/>
           </a:ln>
         </p:spPr>
+        <p:txBody>
+          <a:bodyPr/>
+          <a:p/>
+        </p:txBody>
       </p:sp>
       <p:sp>
         <p:nvSpPr>
@@ -5635,6 +5731,10 @@
             <a:prstDash val="solid"/>
           </a:ln>
         </p:spPr>
+        <p:txBody>
+          <a:bodyPr/>
+          <a:p/>
+        </p:txBody>
       </p:sp>
       <p:sp>
         <p:nvSpPr>
@@ -5701,6 +5801,10 @@
             <a:prstDash val="solid"/>
           </a:ln>
         </p:spPr>
+        <p:txBody>
+          <a:bodyPr/>
+          <a:p/>
+        </p:txBody>
       </p:sp>
       <p:sp>
         <p:nvSpPr>
@@ -5767,6 +5871,10 @@
             <a:prstDash val="solid"/>
           </a:ln>
         </p:spPr>
+        <p:txBody>
+          <a:bodyPr/>
+          <a:p/>
+        </p:txBody>
       </p:sp>
       <p:sp>
         <p:nvSpPr>
@@ -5833,6 +5941,10 @@
             <a:prstDash val="solid"/>
           </a:ln>
         </p:spPr>
+        <p:txBody>
+          <a:bodyPr/>
+          <a:p/>
+        </p:txBody>
       </p:sp>
       <p:sp>
         <p:nvSpPr>
@@ -5899,6 +6011,10 @@
             <a:prstDash val="solid"/>
           </a:ln>
         </p:spPr>
+        <p:txBody>
+          <a:bodyPr/>
+          <a:p/>
+        </p:txBody>
       </p:sp>
       <p:sp>
         <p:nvSpPr>
@@ -6075,6 +6191,10 @@
             <a:prstDash val="solid"/>
           </a:ln>
         </p:spPr>
+        <p:txBody>
+          <a:bodyPr/>
+          <a:p/>
+        </p:txBody>
       </p:sp>
       <p:sp>
         <p:nvSpPr>
@@ -6180,6 +6300,10 @@
             <a:prstDash val="solid"/>
           </a:ln>
         </p:spPr>
+        <p:txBody>
+          <a:bodyPr/>
+          <a:p/>
+        </p:txBody>
       </p:sp>
       <p:sp>
         <p:nvSpPr>
@@ -6283,6 +6407,10 @@
             <a:prstDash val="solid"/>
           </a:ln>
         </p:spPr>
+        <p:txBody>
+          <a:bodyPr/>
+          <a:p/>
+        </p:txBody>
       </p:sp>
       <p:sp>
         <p:nvSpPr>
@@ -6310,6 +6438,10 @@
             <a:prstDash val="solid"/>
           </a:ln>
         </p:spPr>
+        <p:txBody>
+          <a:bodyPr/>
+          <a:p/>
+        </p:txBody>
       </p:sp>
       <p:sp>
         <p:nvSpPr>
@@ -6415,6 +6547,10 @@
             <a:prstDash val="solid"/>
           </a:ln>
         </p:spPr>
+        <p:txBody>
+          <a:bodyPr/>
+          <a:p/>
+        </p:txBody>
       </p:sp>
       <p:sp>
         <p:nvSpPr>
@@ -6518,6 +6654,10 @@
             <a:prstDash val="solid"/>
           </a:ln>
         </p:spPr>
+        <p:txBody>
+          <a:bodyPr/>
+          <a:p/>
+        </p:txBody>
       </p:sp>
       <p:sp>
         <p:nvSpPr>
@@ -6545,6 +6685,10 @@
             <a:prstDash val="solid"/>
           </a:ln>
         </p:spPr>
+        <p:txBody>
+          <a:bodyPr/>
+          <a:p/>
+        </p:txBody>
       </p:sp>
       <p:sp>
         <p:nvSpPr>
@@ -6721,6 +6865,10 @@
             <a:prstDash val="solid"/>
           </a:ln>
         </p:spPr>
+        <p:txBody>
+          <a:bodyPr/>
+          <a:p/>
+        </p:txBody>
       </p:sp>
       <p:sp>
         <p:nvSpPr>
@@ -6870,6 +7018,10 @@
             </a:outerShdw>
           </a:effectLst>
         </p:spPr>
+        <p:txBody>
+          <a:bodyPr/>
+          <a:p/>
+        </p:txBody>
       </p:sp>
       <p:sp>
         <p:nvSpPr>
@@ -6973,6 +7125,10 @@
             <a:prstDash val="solid"/>
           </a:ln>
         </p:spPr>
+        <p:txBody>
+          <a:bodyPr/>
+          <a:p/>
+        </p:txBody>
       </p:sp>
     </p:spTree>
   </p:cSld>
@@ -7110,6 +7266,10 @@
             <a:prstDash val="solid"/>
           </a:ln>
         </p:spPr>
+        <p:txBody>
+          <a:bodyPr/>
+          <a:p/>
+        </p:txBody>
       </p:sp>
       <p:sp>
         <p:nvSpPr>
@@ -7130,6 +7290,10 @@
           </a:solidFill>
           <a:ln/>
         </p:spPr>
+        <p:txBody>
+          <a:bodyPr/>
+          <a:p/>
+        </p:txBody>
       </p:sp>
       <p:sp>
         <p:nvSpPr>
@@ -7242,6 +7406,10 @@
           </a:solidFill>
           <a:ln/>
         </p:spPr>
+        <p:txBody>
+          <a:bodyPr/>
+          <a:p/>
+        </p:txBody>
       </p:sp>
       <p:sp>
         <p:nvSpPr>
@@ -7354,6 +7522,10 @@
           </a:solidFill>
           <a:ln/>
         </p:spPr>
+        <p:txBody>
+          <a:bodyPr/>
+          <a:p/>
+        </p:txBody>
       </p:sp>
       <p:sp>
         <p:nvSpPr>
@@ -7466,6 +7638,10 @@
           </a:solidFill>
           <a:ln/>
         </p:spPr>
+        <p:txBody>
+          <a:bodyPr/>
+          <a:p/>
+        </p:txBody>
       </p:sp>
       <p:sp>
         <p:nvSpPr>
@@ -7585,6 +7761,10 @@
             <a:prstDash val="solid"/>
           </a:ln>
         </p:spPr>
+        <p:txBody>
+          <a:bodyPr/>
+          <a:p/>
+        </p:txBody>
       </p:sp>
       <p:sp>
         <p:nvSpPr>
@@ -7917,6 +8097,10 @@
             <a:prstDash val="solid"/>
           </a:ln>
         </p:spPr>
+        <p:txBody>
+          <a:bodyPr/>
+          <a:p/>
+        </p:txBody>
       </p:sp>
       <p:sp>
         <p:nvSpPr>
@@ -7983,6 +8167,10 @@
             <a:prstDash val="solid"/>
           </a:ln>
         </p:spPr>
+        <p:txBody>
+          <a:bodyPr/>
+          <a:p/>
+        </p:txBody>
       </p:sp>
       <p:sp>
         <p:nvSpPr>
@@ -8049,6 +8237,10 @@
             <a:prstDash val="solid"/>
           </a:ln>
         </p:spPr>
+        <p:txBody>
+          <a:bodyPr/>
+          <a:p/>
+        </p:txBody>
       </p:sp>
       <p:sp>
         <p:nvSpPr>
@@ -8115,6 +8307,10 @@
             <a:prstDash val="solid"/>
           </a:ln>
         </p:spPr>
+        <p:txBody>
+          <a:bodyPr/>
+          <a:p/>
+        </p:txBody>
       </p:sp>
       <p:sp>
         <p:nvSpPr>
@@ -8181,6 +8377,10 @@
             <a:prstDash val="solid"/>
           </a:ln>
         </p:spPr>
+        <p:txBody>
+          <a:bodyPr/>
+          <a:p/>
+        </p:txBody>
       </p:sp>
       <p:sp>
         <p:nvSpPr>
@@ -8206,6 +8406,10 @@
             <a:prstDash val="solid"/>
           </a:ln>
         </p:spPr>
+        <p:txBody>
+          <a:bodyPr/>
+          <a:p/>
+        </p:txBody>
       </p:sp>
       <p:sp>
         <p:nvSpPr>
@@ -8311,6 +8515,10 @@
             <a:prstDash val="solid"/>
           </a:ln>
         </p:spPr>
+        <p:txBody>
+          <a:bodyPr/>
+          <a:p/>
+        </p:txBody>
       </p:sp>
       <p:sp>
         <p:nvSpPr>
@@ -8336,6 +8544,10 @@
             <a:prstDash val="solid"/>
           </a:ln>
         </p:spPr>
+        <p:txBody>
+          <a:bodyPr/>
+          <a:p/>
+        </p:txBody>
       </p:sp>
       <p:sp>
         <p:nvSpPr>
@@ -8551,6 +8763,10 @@
             <a:prstDash val="solid"/>
           </a:ln>
         </p:spPr>
+        <p:txBody>
+          <a:bodyPr/>
+          <a:p/>
+        </p:txBody>
       </p:sp>
       <p:sp>
         <p:nvSpPr>
@@ -8693,6 +8909,10 @@
             <a:prstDash val="solid"/>
           </a:ln>
         </p:spPr>
+        <p:txBody>
+          <a:bodyPr/>
+          <a:p/>
+        </p:txBody>
       </p:sp>
       <p:sp>
         <p:nvSpPr>
@@ -8720,6 +8940,10 @@
             <a:prstDash val="solid"/>
           </a:ln>
         </p:spPr>
+        <p:txBody>
+          <a:bodyPr/>
+          <a:p/>
+        </p:txBody>
       </p:sp>
       <p:sp>
         <p:nvSpPr>
@@ -8825,6 +9049,10 @@
             <a:prstDash val="solid"/>
           </a:ln>
         </p:spPr>
+        <p:txBody>
+          <a:bodyPr/>
+          <a:p/>
+        </p:txBody>
       </p:sp>
       <p:sp>
         <p:nvSpPr>
@@ -9040,6 +9268,10 @@
             <a:prstDash val="solid"/>
           </a:ln>
         </p:spPr>
+        <p:txBody>
+          <a:bodyPr/>
+          <a:p/>
+        </p:txBody>
       </p:sp>
       <p:sp>
         <p:nvSpPr>
@@ -9212,6 +9444,10 @@
             <a:prstDash val="solid"/>
           </a:ln>
         </p:spPr>
+        <p:txBody>
+          <a:bodyPr/>
+          <a:p/>
+        </p:txBody>
       </p:sp>
       <p:sp>
         <p:nvSpPr>
@@ -9278,6 +9514,10 @@
             <a:prstDash val="solid"/>
           </a:ln>
         </p:spPr>
+        <p:txBody>
+          <a:bodyPr/>
+          <a:p/>
+        </p:txBody>
       </p:sp>
       <p:sp>
         <p:nvSpPr>
@@ -9415,6 +9655,10 @@
             <a:prstDash val="solid"/>
           </a:ln>
         </p:spPr>
+        <p:txBody>
+          <a:bodyPr/>
+          <a:p/>
+        </p:txBody>
       </p:sp>
       <p:sp>
         <p:nvSpPr>
@@ -9559,6 +9803,10 @@
             <a:prstDash val="solid"/>
           </a:ln>
         </p:spPr>
+        <p:txBody>
+          <a:bodyPr/>
+          <a:p/>
+        </p:txBody>
       </p:sp>
       <p:sp>
         <p:nvSpPr>
@@ -9584,6 +9832,10 @@
             <a:prstDash val="solid"/>
           </a:ln>
         </p:spPr>
+        <p:txBody>
+          <a:bodyPr/>
+          <a:p/>
+        </p:txBody>
       </p:sp>
       <p:sp>
         <p:nvSpPr>
@@ -9689,6 +9941,10 @@
             <a:prstDash val="solid"/>
           </a:ln>
         </p:spPr>
+        <p:txBody>
+          <a:bodyPr/>
+          <a:p/>
+        </p:txBody>
       </p:sp>
       <p:sp>
         <p:nvSpPr>
@@ -9714,6 +9970,10 @@
             <a:prstDash val="solid"/>
           </a:ln>
         </p:spPr>
+        <p:txBody>
+          <a:bodyPr/>
+          <a:p/>
+        </p:txBody>
       </p:sp>
       <p:sp>
         <p:nvSpPr>
@@ -9819,6 +10079,10 @@
             <a:prstDash val="solid"/>
           </a:ln>
         </p:spPr>
+        <p:txBody>
+          <a:bodyPr/>
+          <a:p/>
+        </p:txBody>
       </p:sp>
       <p:sp>
         <p:nvSpPr>
@@ -9844,6 +10108,10 @@
             <a:prstDash val="solid"/>
           </a:ln>
         </p:spPr>
+        <p:txBody>
+          <a:bodyPr/>
+          <a:p/>
+        </p:txBody>
       </p:sp>
       <p:sp>
         <p:nvSpPr>
@@ -9949,6 +10217,10 @@
             <a:prstDash val="solid"/>
           </a:ln>
         </p:spPr>
+        <p:txBody>
+          <a:bodyPr/>
+          <a:p/>
+        </p:txBody>
       </p:sp>
       <p:sp>
         <p:nvSpPr>
@@ -9974,6 +10246,10 @@
             <a:prstDash val="solid"/>
           </a:ln>
         </p:spPr>
+        <p:txBody>
+          <a:bodyPr/>
+          <a:p/>
+        </p:txBody>
       </p:sp>
       <p:sp>
         <p:nvSpPr>
@@ -10079,6 +10355,10 @@
             <a:prstDash val="solid"/>
           </a:ln>
         </p:spPr>
+        <p:txBody>
+          <a:bodyPr/>
+          <a:p/>
+        </p:txBody>
       </p:sp>
       <p:sp>
         <p:nvSpPr>
@@ -10255,6 +10535,10 @@
             <a:prstDash val="solid"/>
           </a:ln>
         </p:spPr>
+        <p:txBody>
+          <a:bodyPr/>
+          <a:p/>
+        </p:txBody>
       </p:sp>
       <p:sp>
         <p:nvSpPr>
@@ -10321,6 +10605,10 @@
             <a:prstDash val="solid"/>
           </a:ln>
         </p:spPr>
+        <p:txBody>
+          <a:bodyPr/>
+          <a:p/>
+        </p:txBody>
       </p:sp>
       <p:sp>
         <p:nvSpPr>
@@ -10387,6 +10675,10 @@
             <a:prstDash val="solid"/>
           </a:ln>
         </p:spPr>
+        <p:txBody>
+          <a:bodyPr/>
+          <a:p/>
+        </p:txBody>
       </p:sp>
       <p:sp>
         <p:nvSpPr>
@@ -10453,6 +10745,10 @@
             <a:prstDash val="solid"/>
           </a:ln>
         </p:spPr>
+        <p:txBody>
+          <a:bodyPr/>
+          <a:p/>
+        </p:txBody>
       </p:sp>
       <p:sp>
         <p:nvSpPr>
@@ -10519,6 +10815,10 @@
             <a:prstDash val="solid"/>
           </a:ln>
         </p:spPr>
+        <p:txBody>
+          <a:bodyPr/>
+          <a:p/>
+        </p:txBody>
       </p:sp>
       <p:sp>
         <p:nvSpPr>
@@ -10624,6 +10924,10 @@
             <a:prstDash val="solid"/>
           </a:ln>
         </p:spPr>
+        <p:txBody>
+          <a:bodyPr/>
+          <a:p/>
+        </p:txBody>
       </p:sp>
       <p:sp>
         <p:nvSpPr>
@@ -10690,6 +10994,10 @@
             <a:prstDash val="solid"/>
           </a:ln>
         </p:spPr>
+        <p:txBody>
+          <a:bodyPr/>
+          <a:p/>
+        </p:txBody>
       </p:sp>
       <p:sp>
         <p:nvSpPr>
@@ -10715,6 +11023,10 @@
             <a:prstDash val="solid"/>
           </a:ln>
         </p:spPr>
+        <p:txBody>
+          <a:bodyPr/>
+          <a:p/>
+        </p:txBody>
       </p:sp>
       <p:sp>
         <p:nvSpPr>
@@ -10820,6 +11132,10 @@
             <a:prstDash val="solid"/>
           </a:ln>
         </p:spPr>
+        <p:txBody>
+          <a:bodyPr/>
+          <a:p/>
+        </p:txBody>
       </p:sp>
       <p:sp>
         <p:nvSpPr>
@@ -10845,6 +11161,10 @@
             <a:prstDash val="solid"/>
           </a:ln>
         </p:spPr>
+        <p:txBody>
+          <a:bodyPr/>
+          <a:p/>
+        </p:txBody>
       </p:sp>
       <p:sp>
         <p:nvSpPr>
@@ -10950,6 +11270,10 @@
             <a:prstDash val="solid"/>
           </a:ln>
         </p:spPr>
+        <p:txBody>
+          <a:bodyPr/>
+          <a:p/>
+        </p:txBody>
       </p:sp>
       <p:sp>
         <p:nvSpPr>
@@ -10975,6 +11299,10 @@
             <a:prstDash val="solid"/>
           </a:ln>
         </p:spPr>
+        <p:txBody>
+          <a:bodyPr/>
+          <a:p/>
+        </p:txBody>
       </p:sp>
       <p:sp>
         <p:nvSpPr>
@@ -11190,6 +11518,10 @@
             <a:prstDash val="solid"/>
           </a:ln>
         </p:spPr>
+        <p:txBody>
+          <a:bodyPr/>
+          <a:p/>
+        </p:txBody>
       </p:sp>
       <p:sp>
         <p:nvSpPr>
@@ -11215,6 +11547,10 @@
             <a:prstDash val="solid"/>
           </a:ln>
         </p:spPr>
+        <p:txBody>
+          <a:bodyPr/>
+          <a:p/>
+        </p:txBody>
       </p:sp>
       <p:sp>
         <p:nvSpPr>
@@ -11235,6 +11571,10 @@
           </a:solidFill>
           <a:ln/>
         </p:spPr>
+        <p:txBody>
+          <a:bodyPr/>
+          <a:p/>
+        </p:txBody>
       </p:sp>
       <p:sp>
         <p:nvSpPr>
@@ -11379,6 +11719,10 @@
             <a:prstDash val="solid"/>
           </a:ln>
         </p:spPr>
+        <p:txBody>
+          <a:bodyPr/>
+          <a:p/>
+        </p:txBody>
       </p:sp>
       <p:sp>
         <p:nvSpPr>
@@ -11404,6 +11748,10 @@
             <a:prstDash val="solid"/>
           </a:ln>
         </p:spPr>
+        <p:txBody>
+          <a:bodyPr/>
+          <a:p/>
+        </p:txBody>
       </p:sp>
       <p:sp>
         <p:nvSpPr>
@@ -11424,6 +11772,10 @@
           </a:solidFill>
           <a:ln/>
         </p:spPr>
+        <p:txBody>
+          <a:bodyPr/>
+          <a:p/>
+        </p:txBody>
       </p:sp>
       <p:sp>
         <p:nvSpPr>
@@ -11568,6 +11920,10 @@
             <a:prstDash val="solid"/>
           </a:ln>
         </p:spPr>
+        <p:txBody>
+          <a:bodyPr/>
+          <a:p/>
+        </p:txBody>
       </p:sp>
       <p:sp>
         <p:nvSpPr>
@@ -11593,6 +11949,10 @@
             <a:prstDash val="solid"/>
           </a:ln>
         </p:spPr>
+        <p:txBody>
+          <a:bodyPr/>
+          <a:p/>
+        </p:txBody>
       </p:sp>
       <p:sp>
         <p:nvSpPr>
@@ -11613,6 +11973,10 @@
           </a:solidFill>
           <a:ln/>
         </p:spPr>
+        <p:txBody>
+          <a:bodyPr/>
+          <a:p/>
+        </p:txBody>
       </p:sp>
       <p:sp>
         <p:nvSpPr>
@@ -11757,6 +12121,10 @@
             <a:prstDash val="solid"/>
           </a:ln>
         </p:spPr>
+        <p:txBody>
+          <a:bodyPr/>
+          <a:p/>
+        </p:txBody>
       </p:sp>
       <p:sp>
         <p:nvSpPr>
@@ -11782,6 +12150,10 @@
             <a:prstDash val="solid"/>
           </a:ln>
         </p:spPr>
+        <p:txBody>
+          <a:bodyPr/>
+          <a:p/>
+        </p:txBody>
       </p:sp>
       <p:sp>
         <p:nvSpPr>
@@ -11802,6 +12174,10 @@
           </a:solidFill>
           <a:ln/>
         </p:spPr>
+        <p:txBody>
+          <a:bodyPr/>
+          <a:p/>
+        </p:txBody>
       </p:sp>
       <p:sp>
         <p:nvSpPr>
@@ -12095,6 +12471,10 @@
             <a:prstDash val="solid"/>
           </a:ln>
         </p:spPr>
+        <p:txBody>
+          <a:bodyPr/>
+          <a:p/>
+        </p:txBody>
       </p:sp>
       <p:sp>
         <p:nvSpPr>
@@ -12120,6 +12500,10 @@
             <a:prstDash val="solid"/>
           </a:ln>
         </p:spPr>
+        <p:txBody>
+          <a:bodyPr/>
+          <a:p/>
+        </p:txBody>
       </p:sp>
       <p:sp>
         <p:nvSpPr>
@@ -12140,6 +12524,10 @@
           </a:solidFill>
           <a:ln/>
         </p:spPr>
+        <p:txBody>
+          <a:bodyPr/>
+          <a:p/>
+        </p:txBody>
       </p:sp>
       <p:sp>
         <p:nvSpPr>
@@ -12245,6 +12633,10 @@
             <a:prstDash val="solid"/>
           </a:ln>
         </p:spPr>
+        <p:txBody>
+          <a:bodyPr/>
+          <a:p/>
+        </p:txBody>
       </p:sp>
       <p:sp>
         <p:nvSpPr>
@@ -12270,6 +12662,10 @@
             <a:prstDash val="solid"/>
           </a:ln>
         </p:spPr>
+        <p:txBody>
+          <a:bodyPr/>
+          <a:p/>
+        </p:txBody>
       </p:sp>
       <p:sp>
         <p:nvSpPr>
@@ -12290,6 +12686,10 @@
           </a:solidFill>
           <a:ln/>
         </p:spPr>
+        <p:txBody>
+          <a:bodyPr/>
+          <a:p/>
+        </p:txBody>
       </p:sp>
       <p:sp>
         <p:nvSpPr>
@@ -12395,6 +12795,10 @@
             <a:prstDash val="solid"/>
           </a:ln>
         </p:spPr>
+        <p:txBody>
+          <a:bodyPr/>
+          <a:p/>
+        </p:txBody>
       </p:sp>
       <p:sp>
         <p:nvSpPr>
@@ -12532,6 +12936,10 @@
             <a:prstDash val="solid"/>
           </a:ln>
         </p:spPr>
+        <p:txBody>
+          <a:bodyPr/>
+          <a:p/>
+        </p:txBody>
       </p:sp>
       <p:sp>
         <p:nvSpPr>
@@ -12637,6 +13045,10 @@
             <a:prstDash val="solid"/>
           </a:ln>
         </p:spPr>
+        <p:txBody>
+          <a:bodyPr/>
+          <a:p/>
+        </p:txBody>
       </p:sp>
       <p:sp>
         <p:nvSpPr>
@@ -12662,6 +13074,10 @@
             <a:prstDash val="solid"/>
           </a:ln>
         </p:spPr>
+        <p:txBody>
+          <a:bodyPr/>
+          <a:p/>
+        </p:txBody>
       </p:sp>
       <p:sp>
         <p:nvSpPr>
@@ -12767,6 +13183,10 @@
             <a:prstDash val="solid"/>
           </a:ln>
         </p:spPr>
+        <p:txBody>
+          <a:bodyPr/>
+          <a:p/>
+        </p:txBody>
       </p:sp>
       <p:sp>
         <p:nvSpPr>
@@ -12792,6 +13212,10 @@
             <a:prstDash val="solid"/>
           </a:ln>
         </p:spPr>
+        <p:txBody>
+          <a:bodyPr/>
+          <a:p/>
+        </p:txBody>
       </p:sp>
       <p:sp>
         <p:nvSpPr>
@@ -12897,6 +13321,10 @@
             <a:prstDash val="solid"/>
           </a:ln>
         </p:spPr>
+        <p:txBody>
+          <a:bodyPr/>
+          <a:p/>
+        </p:txBody>
       </p:sp>
       <p:sp>
         <p:nvSpPr>
@@ -12922,6 +13350,10 @@
             <a:prstDash val="solid"/>
           </a:ln>
         </p:spPr>
+        <p:txBody>
+          <a:bodyPr/>
+          <a:p/>
+        </p:txBody>
       </p:sp>
       <p:sp>
         <p:nvSpPr>
@@ -13027,6 +13459,10 @@
             <a:prstDash val="solid"/>
           </a:ln>
         </p:spPr>
+        <p:txBody>
+          <a:bodyPr/>
+          <a:p/>
+        </p:txBody>
       </p:sp>
       <p:sp>
         <p:nvSpPr>
@@ -13125,6 +13561,10 @@
             <a:prstDash val="solid"/>
           </a:ln>
         </p:spPr>
+        <p:txBody>
+          <a:bodyPr/>
+          <a:p/>
+        </p:txBody>
       </p:sp>
       <p:sp>
         <p:nvSpPr>
@@ -13198,7 +13638,7 @@
                 <a:ea typeface="Palatino Linotype" pitchFamily="34" charset="-122"/>
                 <a:cs typeface="Palatino Linotype" pitchFamily="34" charset="-120"/>
               </a:rPr>
-              <a:t>MAMA ȘI TOMOGRAFIA</a:t>
+              <a:t>MAMA ȘI EXAMENUL CT</a:t>
             </a:r>
             <a:endParaRPr lang="en-US" sz="1300" dirty="0"/>
           </a:p>
@@ -13230,6 +13670,10 @@
             <a:prstDash val="solid"/>
           </a:ln>
         </p:spPr>
+        <p:txBody>
+          <a:bodyPr/>
+          <a:p/>
+        </p:txBody>
       </p:sp>
       <p:sp>
         <p:nvSpPr>
@@ -13335,6 +13779,10 @@
             <a:prstDash val="solid"/>
           </a:ln>
         </p:spPr>
+        <p:txBody>
+          <a:bodyPr/>
+          <a:p/>
+        </p:txBody>
       </p:sp>
       <p:sp>
         <p:nvSpPr>
@@ -13408,7 +13856,7 @@
                 <a:ea typeface="Palatino Linotype" pitchFamily="34" charset="-122"/>
                 <a:cs typeface="Palatino Linotype" pitchFamily="34" charset="-120"/>
               </a:rPr>
-              <a:t>de tomografii ale capului, la copii sub 10 ani: în 10 ani, un caz în plus de leucemie și unul de tumoră cerebrală.</a:t>
+              <a:t>de examene CT ale capului, la copii sub 10 ani: în 10 ani, un caz în plus de leucemie și unul de tumoră cerebrală.</a:t>
             </a:r>
             <a:endParaRPr lang="en-US" sz="2000" dirty="0"/>
           </a:p>
@@ -13486,7 +13934,7 @@
                 <a:ea typeface="Palatino Linotype" pitchFamily="34" charset="-122"/>
                 <a:cs typeface="Palatino Linotype" pitchFamily="34" charset="-120"/>
               </a:rPr>
-              <a:t>Studiu britanic, cohortă retrospectivă, 2012: prima tomografie înainte de 22 de ani.</a:t>
+              <a:t>Studiu britanic, cohortă retrospectivă, 2012: primul examen CT înainte de 22 de ani.</a:t>
             </a:r>
             <a:endParaRPr lang="en-US" sz="1000" dirty="0"/>
           </a:p>
@@ -13628,6 +14076,10 @@
             <a:prstDash val="solid"/>
           </a:ln>
         </p:spPr>
+        <p:txBody>
+          <a:bodyPr/>
+          <a:p/>
+        </p:txBody>
       </p:sp>
       <p:sp>
         <p:nvSpPr>
@@ -13653,6 +14105,10 @@
             <a:prstDash val="solid"/>
           </a:ln>
         </p:spPr>
+        <p:txBody>
+          <a:bodyPr/>
+          <a:p/>
+        </p:txBody>
       </p:sp>
       <p:sp>
         <p:nvSpPr>
@@ -13758,6 +14214,10 @@
             <a:prstDash val="solid"/>
           </a:ln>
         </p:spPr>
+        <p:txBody>
+          <a:bodyPr/>
+          <a:p/>
+        </p:txBody>
       </p:sp>
       <p:sp>
         <p:nvSpPr>
@@ -13909,6 +14369,10 @@
             <a:prstDash val="solid"/>
           </a:ln>
         </p:spPr>
+        <p:txBody>
+          <a:bodyPr/>
+          <a:p/>
+        </p:txBody>
       </p:sp>
       <p:sp>
         <p:nvSpPr>
@@ -14090,6 +14554,10 @@
             </a:outerShdw>
           </a:effectLst>
         </p:spPr>
+        <p:txBody>
+          <a:bodyPr/>
+          <a:p/>
+        </p:txBody>
       </p:sp>
       <p:sp>
         <p:nvSpPr>
@@ -14291,6 +14759,10 @@
             <a:prstDash val="solid"/>
           </a:ln>
         </p:spPr>
+        <p:txBody>
+          <a:bodyPr/>
+          <a:p/>
+        </p:txBody>
       </p:sp>
       <p:sp>
         <p:nvSpPr>
@@ -14357,6 +14829,10 @@
             <a:prstDash val="solid"/>
           </a:ln>
         </p:spPr>
+        <p:txBody>
+          <a:bodyPr/>
+          <a:p/>
+        </p:txBody>
       </p:sp>
       <p:sp>
         <p:nvSpPr>
@@ -14423,6 +14899,10 @@
             <a:prstDash val="solid"/>
           </a:ln>
         </p:spPr>
+        <p:txBody>
+          <a:bodyPr/>
+          <a:p/>
+        </p:txBody>
       </p:sp>
       <p:sp>
         <p:nvSpPr>
@@ -14489,6 +14969,10 @@
             <a:prstDash val="solid"/>
           </a:ln>
         </p:spPr>
+        <p:txBody>
+          <a:bodyPr/>
+          <a:p/>
+        </p:txBody>
       </p:sp>
       <p:sp>
         <p:nvSpPr>
@@ -14555,6 +15039,10 @@
             <a:prstDash val="solid"/>
           </a:ln>
         </p:spPr>
+        <p:txBody>
+          <a:bodyPr/>
+          <a:p/>
+        </p:txBody>
       </p:sp>
       <p:sp>
         <p:nvSpPr>
@@ -14727,6 +15215,10 @@
             <a:prstDash val="solid"/>
           </a:ln>
         </p:spPr>
+        <p:txBody>
+          <a:bodyPr/>
+          <a:p/>
+        </p:txBody>
       </p:sp>
       <p:sp>
         <p:nvSpPr>
@@ -14825,6 +15317,10 @@
             <a:prstDash val="solid"/>
           </a:ln>
         </p:spPr>
+        <p:txBody>
+          <a:bodyPr/>
+          <a:p/>
+        </p:txBody>
       </p:sp>
       <p:sp>
         <p:nvSpPr>
@@ -15008,6 +15504,10 @@
             <a:prstDash val="solid"/>
           </a:ln>
         </p:spPr>
+        <p:txBody>
+          <a:bodyPr/>
+          <a:p/>
+        </p:txBody>
       </p:sp>
       <p:sp>
         <p:nvSpPr>
@@ -15033,6 +15533,10 @@
             <a:prstDash val="solid"/>
           </a:ln>
         </p:spPr>
+        <p:txBody>
+          <a:bodyPr/>
+          <a:p/>
+        </p:txBody>
       </p:sp>
       <p:sp>
         <p:nvSpPr>
@@ -15099,6 +15603,10 @@
             <a:prstDash val="solid"/>
           </a:ln>
         </p:spPr>
+        <p:txBody>
+          <a:bodyPr/>
+          <a:p/>
+        </p:txBody>
       </p:sp>
       <p:sp>
         <p:nvSpPr>
@@ -15312,6 +15820,10 @@
             <a:prstDash val="solid"/>
           </a:ln>
         </p:spPr>
+        <p:txBody>
+          <a:bodyPr/>
+          <a:p/>
+        </p:txBody>
       </p:sp>
       <p:sp>
         <p:nvSpPr>
@@ -15332,6 +15844,10 @@
           </a:solidFill>
           <a:ln/>
         </p:spPr>
+        <p:txBody>
+          <a:bodyPr/>
+          <a:p/>
+        </p:txBody>
       </p:sp>
       <p:sp>
         <p:nvSpPr>
@@ -15430,6 +15946,10 @@
           </a:solidFill>
           <a:ln/>
         </p:spPr>
+        <p:txBody>
+          <a:bodyPr/>
+          <a:p/>
+        </p:txBody>
       </p:sp>
       <p:sp>
         <p:nvSpPr>
@@ -15528,6 +16048,10 @@
           </a:solidFill>
           <a:ln/>
         </p:spPr>
+        <p:txBody>
+          <a:bodyPr/>
+          <a:p/>
+        </p:txBody>
       </p:sp>
       <p:sp>
         <p:nvSpPr>
@@ -15626,6 +16150,10 @@
           </a:solidFill>
           <a:ln/>
         </p:spPr>
+        <p:txBody>
+          <a:bodyPr/>
+          <a:p/>
+        </p:txBody>
       </p:sp>
       <p:sp>
         <p:nvSpPr>
@@ -15731,6 +16259,10 @@
             <a:prstDash val="solid"/>
           </a:ln>
         </p:spPr>
+        <p:txBody>
+          <a:bodyPr/>
+          <a:p/>
+        </p:txBody>
       </p:sp>
       <p:sp>
         <p:nvSpPr>
@@ -15939,6 +16471,10 @@
           </a:solidFill>
           <a:ln/>
         </p:spPr>
+        <p:txBody>
+          <a:bodyPr/>
+          <a:p/>
+        </p:txBody>
       </p:sp>
       <p:sp>
         <p:nvSpPr>
@@ -16044,6 +16580,10 @@
             <a:prstDash val="solid"/>
           </a:ln>
         </p:spPr>
+        <p:txBody>
+          <a:bodyPr/>
+          <a:p/>
+        </p:txBody>
       </p:sp>
       <p:sp>
         <p:nvSpPr>
@@ -16069,6 +16609,10 @@
             <a:prstDash val="solid"/>
           </a:ln>
         </p:spPr>
+        <p:txBody>
+          <a:bodyPr/>
+          <a:p/>
+        </p:txBody>
       </p:sp>
       <p:sp>
         <p:nvSpPr>
@@ -16128,6 +16672,10 @@
           </a:solidFill>
           <a:ln/>
         </p:spPr>
+        <p:txBody>
+          <a:bodyPr/>
+          <a:p/>
+        </p:txBody>
       </p:sp>
       <p:sp>
         <p:nvSpPr>
@@ -16233,6 +16781,10 @@
             <a:prstDash val="solid"/>
           </a:ln>
         </p:spPr>
+        <p:txBody>
+          <a:bodyPr/>
+          <a:p/>
+        </p:txBody>
       </p:sp>
       <p:sp>
         <p:nvSpPr>
@@ -16258,6 +16810,10 @@
             <a:prstDash val="solid"/>
           </a:ln>
         </p:spPr>
+        <p:txBody>
+          <a:bodyPr/>
+          <a:p/>
+        </p:txBody>
       </p:sp>
       <p:sp>
         <p:nvSpPr>
@@ -16317,6 +16873,10 @@
           </a:solidFill>
           <a:ln/>
         </p:spPr>
+        <p:txBody>
+          <a:bodyPr/>
+          <a:p/>
+        </p:txBody>
       </p:sp>
       <p:sp>
         <p:nvSpPr>
@@ -16422,6 +16982,10 @@
             <a:prstDash val="solid"/>
           </a:ln>
         </p:spPr>
+        <p:txBody>
+          <a:bodyPr/>
+          <a:p/>
+        </p:txBody>
       </p:sp>
       <p:sp>
         <p:nvSpPr>
@@ -16447,6 +17011,10 @@
             <a:prstDash val="solid"/>
           </a:ln>
         </p:spPr>
+        <p:txBody>
+          <a:bodyPr/>
+          <a:p/>
+        </p:txBody>
       </p:sp>
       <p:sp>
         <p:nvSpPr>
@@ -16513,6 +17081,10 @@
             <a:prstDash val="solid"/>
           </a:ln>
         </p:spPr>
+        <p:txBody>
+          <a:bodyPr/>
+          <a:p/>
+        </p:txBody>
       </p:sp>
       <p:sp>
         <p:nvSpPr>
@@ -16618,6 +17190,10 @@
             <a:prstDash val="solid"/>
           </a:ln>
         </p:spPr>
+        <p:txBody>
+          <a:bodyPr/>
+          <a:p/>
+        </p:txBody>
       </p:sp>
       <p:sp>
         <p:nvSpPr>
@@ -16760,6 +17336,10 @@
             </a:outerShdw>
           </a:effectLst>
         </p:spPr>
+        <p:txBody>
+          <a:bodyPr/>
+          <a:p/>
+        </p:txBody>
       </p:sp>
       <p:sp>
         <p:nvSpPr>
@@ -16824,6 +17404,10 @@
             <a:prstDash val="solid"/>
           </a:ln>
         </p:spPr>
+        <p:txBody>
+          <a:bodyPr/>
+          <a:p/>
+        </p:txBody>
       </p:sp>
       <p:sp>
         <p:nvSpPr>
@@ -16888,6 +17472,10 @@
             <a:prstDash val="solid"/>
           </a:ln>
         </p:spPr>
+        <p:txBody>
+          <a:bodyPr/>
+          <a:p/>
+        </p:txBody>
       </p:sp>
       <p:sp>
         <p:nvSpPr>
@@ -16913,6 +17501,10 @@
             <a:prstDash val="solid"/>
           </a:ln>
         </p:spPr>
+        <p:txBody>
+          <a:bodyPr/>
+          <a:p/>
+        </p:txBody>
       </p:sp>
       <p:sp>
         <p:nvSpPr>
@@ -16938,6 +17530,10 @@
             <a:prstDash val="solid"/>
           </a:ln>
         </p:spPr>
+        <p:txBody>
+          <a:bodyPr/>
+          <a:p/>
+        </p:txBody>
       </p:sp>
       <p:sp>
         <p:nvSpPr>
@@ -17075,6 +17671,10 @@
             <a:prstDash val="solid"/>
           </a:ln>
         </p:spPr>
+        <p:txBody>
+          <a:bodyPr/>
+          <a:p/>
+        </p:txBody>
       </p:sp>
       <p:sp>
         <p:nvSpPr>
@@ -17219,6 +17819,10 @@
             <a:prstDash val="solid"/>
           </a:ln>
         </p:spPr>
+        <p:txBody>
+          <a:bodyPr/>
+          <a:p/>
+        </p:txBody>
       </p:sp>
       <p:sp>
         <p:nvSpPr>
@@ -17244,6 +17848,10 @@
             <a:prstDash val="solid"/>
           </a:ln>
         </p:spPr>
+        <p:txBody>
+          <a:bodyPr/>
+          <a:p/>
+        </p:txBody>
       </p:sp>
       <p:sp>
         <p:nvSpPr>
@@ -17349,6 +17957,10 @@
             <a:prstDash val="solid"/>
           </a:ln>
         </p:spPr>
+        <p:txBody>
+          <a:bodyPr/>
+          <a:p/>
+        </p:txBody>
       </p:sp>
       <p:sp>
         <p:nvSpPr>
@@ -17374,6 +17986,10 @@
             <a:prstDash val="solid"/>
           </a:ln>
         </p:spPr>
+        <p:txBody>
+          <a:bodyPr/>
+          <a:p/>
+        </p:txBody>
       </p:sp>
       <p:sp>
         <p:nvSpPr>
@@ -17479,6 +18095,10 @@
             <a:prstDash val="solid"/>
           </a:ln>
         </p:spPr>
+        <p:txBody>
+          <a:bodyPr/>
+          <a:p/>
+        </p:txBody>
       </p:sp>
       <p:sp>
         <p:nvSpPr>
@@ -17694,6 +18314,10 @@
             <a:prstDash val="solid"/>
           </a:ln>
         </p:spPr>
+        <p:txBody>
+          <a:bodyPr/>
+          <a:p/>
+        </p:txBody>
       </p:sp>
       <p:sp>
         <p:nvSpPr>
@@ -17719,6 +18343,10 @@
             <a:prstDash val="solid"/>
           </a:ln>
         </p:spPr>
+        <p:txBody>
+          <a:bodyPr/>
+          <a:p/>
+        </p:txBody>
       </p:sp>
       <p:sp>
         <p:nvSpPr>
@@ -17824,6 +18452,10 @@
             <a:prstDash val="solid"/>
           </a:ln>
         </p:spPr>
+        <p:txBody>
+          <a:bodyPr/>
+          <a:p/>
+        </p:txBody>
       </p:sp>
       <p:sp>
         <p:nvSpPr>
@@ -17849,6 +18481,10 @@
             <a:prstDash val="solid"/>
           </a:ln>
         </p:spPr>
+        <p:txBody>
+          <a:bodyPr/>
+          <a:p/>
+        </p:txBody>
       </p:sp>
       <p:sp>
         <p:nvSpPr>
@@ -17922,7 +18558,7 @@
                 <a:ea typeface="Palatino Linotype" pitchFamily="34" charset="-122"/>
                 <a:cs typeface="Palatino Linotype" pitchFamily="34" charset="-120"/>
               </a:rPr>
-              <a:t>Ascuns: un caz în plus de leucemie și unul de tumoră cerebrală la 10 000 de tomografii ale capului, la copii sub 10 ani, în 10 ani.</a:t>
+              <a:t>Ascuns: un caz în plus de leucemie și unul de tumoră cerebrală la 10 000 de examene CT ale capului, la copii sub 10 ani, în 10 ani.</a:t>
             </a:r>
             <a:endParaRPr lang="en-US" sz="1650" dirty="0"/>
           </a:p>
@@ -17954,6 +18590,10 @@
             <a:prstDash val="solid"/>
           </a:ln>
         </p:spPr>
+        <p:txBody>
+          <a:bodyPr/>
+          <a:p/>
+        </p:txBody>
       </p:sp>
       <p:sp>
         <p:nvSpPr>
@@ -17979,6 +18619,10 @@
             <a:prstDash val="solid"/>
           </a:ln>
         </p:spPr>
+        <p:txBody>
+          <a:bodyPr/>
+          <a:p/>
+        </p:txBody>
       </p:sp>
       <p:sp>
         <p:nvSpPr>
@@ -18084,6 +18728,10 @@
             <a:prstDash val="solid"/>
           </a:ln>
         </p:spPr>
+        <p:txBody>
+          <a:bodyPr/>
+          <a:p/>
+        </p:txBody>
       </p:sp>
       <p:sp>
         <p:nvSpPr>
@@ -18258,6 +18906,10 @@
             <a:prstDash val="solid"/>
           </a:ln>
         </p:spPr>
+        <p:txBody>
+          <a:bodyPr/>
+          <a:p/>
+        </p:txBody>
       </p:sp>
       <p:sp>
         <p:nvSpPr>
@@ -18283,6 +18935,10 @@
             <a:prstDash val="solid"/>
           </a:ln>
         </p:spPr>
+        <p:txBody>
+          <a:bodyPr/>
+          <a:p/>
+        </p:txBody>
       </p:sp>
       <p:sp>
         <p:nvSpPr>
@@ -18308,6 +18964,10 @@
             <a:prstDash val="solid"/>
           </a:ln>
         </p:spPr>
+        <p:txBody>
+          <a:bodyPr/>
+          <a:p/>
+        </p:txBody>
       </p:sp>
       <p:sp>
         <p:nvSpPr>
@@ -18333,6 +18993,10 @@
             <a:prstDash val="solid"/>
           </a:ln>
         </p:spPr>
+        <p:txBody>
+          <a:bodyPr/>
+          <a:p/>
+        </p:txBody>
       </p:sp>
       <p:sp>
         <p:nvSpPr>
@@ -18365,6 +19029,10 @@
             </a:outerShdw>
           </a:effectLst>
         </p:spPr>
+        <p:txBody>
+          <a:bodyPr/>
+          <a:p/>
+        </p:txBody>
       </p:sp>
       <p:sp>
         <p:nvSpPr>
@@ -18429,6 +19097,10 @@
             <a:prstDash val="solid"/>
           </a:ln>
         </p:spPr>
+        <p:txBody>
+          <a:bodyPr/>
+          <a:p/>
+        </p:txBody>
       </p:sp>
       <p:sp>
         <p:nvSpPr>
@@ -18454,6 +19126,10 @@
             <a:prstDash val="solid"/>
           </a:ln>
         </p:spPr>
+        <p:txBody>
+          <a:bodyPr/>
+          <a:p/>
+        </p:txBody>
       </p:sp>
       <p:sp>
         <p:nvSpPr>
@@ -18479,6 +19155,10 @@
             <a:prstDash val="solid"/>
           </a:ln>
         </p:spPr>
+        <p:txBody>
+          <a:bodyPr/>
+          <a:p/>
+        </p:txBody>
       </p:sp>
       <p:sp>
         <p:nvSpPr>
@@ -18504,6 +19184,10 @@
             <a:prstDash val="solid"/>
           </a:ln>
         </p:spPr>
+        <p:txBody>
+          <a:bodyPr/>
+          <a:p/>
+        </p:txBody>
       </p:sp>
       <p:sp>
         <p:nvSpPr>
@@ -18529,6 +19213,10 @@
             <a:prstDash val="solid"/>
           </a:ln>
         </p:spPr>
+        <p:txBody>
+          <a:bodyPr/>
+          <a:p/>
+        </p:txBody>
       </p:sp>
       <p:sp>
         <p:nvSpPr>
@@ -18554,6 +19242,10 @@
             <a:prstDash val="solid"/>
           </a:ln>
         </p:spPr>
+        <p:txBody>
+          <a:bodyPr/>
+          <a:p/>
+        </p:txBody>
       </p:sp>
       <p:sp>
         <p:nvSpPr>
@@ -18579,6 +19271,10 @@
             <a:prstDash val="solid"/>
           </a:ln>
         </p:spPr>
+        <p:txBody>
+          <a:bodyPr/>
+          <a:p/>
+        </p:txBody>
       </p:sp>
       <p:sp>
         <p:nvSpPr>
@@ -18604,6 +19300,10 @@
             <a:prstDash val="solid"/>
           </a:ln>
         </p:spPr>
+        <p:txBody>
+          <a:bodyPr/>
+          <a:p/>
+        </p:txBody>
       </p:sp>
       <p:sp>
         <p:nvSpPr>
@@ -18629,6 +19329,10 @@
             <a:prstDash val="solid"/>
           </a:ln>
         </p:spPr>
+        <p:txBody>
+          <a:bodyPr/>
+          <a:p/>
+        </p:txBody>
       </p:sp>
       <p:sp>
         <p:nvSpPr>
@@ -18654,6 +19358,10 @@
             <a:prstDash val="solid"/>
           </a:ln>
         </p:spPr>
+        <p:txBody>
+          <a:bodyPr/>
+          <a:p/>
+        </p:txBody>
       </p:sp>
       <p:sp>
         <p:nvSpPr>
@@ -18679,6 +19387,10 @@
             <a:prstDash val="solid"/>
           </a:ln>
         </p:spPr>
+        <p:txBody>
+          <a:bodyPr/>
+          <a:p/>
+        </p:txBody>
       </p:sp>
       <p:sp>
         <p:nvSpPr>
@@ -18704,6 +19416,10 @@
             <a:prstDash val="solid"/>
           </a:ln>
         </p:spPr>
+        <p:txBody>
+          <a:bodyPr/>
+          <a:p/>
+        </p:txBody>
       </p:sp>
       <p:sp>
         <p:nvSpPr>
@@ -18729,6 +19445,10 @@
             <a:prstDash val="solid"/>
           </a:ln>
         </p:spPr>
+        <p:txBody>
+          <a:bodyPr/>
+          <a:p/>
+        </p:txBody>
       </p:sp>
       <p:sp>
         <p:nvSpPr>
@@ -18983,6 +19703,10 @@
             <a:prstDash val="solid"/>
           </a:ln>
         </p:spPr>
+        <p:txBody>
+          <a:bodyPr/>
+          <a:p/>
+        </p:txBody>
       </p:sp>
       <p:sp>
         <p:nvSpPr>
@@ -19088,6 +19812,10 @@
             <a:prstDash val="solid"/>
           </a:ln>
         </p:spPr>
+        <p:txBody>
+          <a:bodyPr/>
+          <a:p/>
+        </p:txBody>
       </p:sp>
       <p:sp>
         <p:nvSpPr>
@@ -19113,6 +19841,10 @@
             <a:prstDash val="solid"/>
           </a:ln>
         </p:spPr>
+        <p:txBody>
+          <a:bodyPr/>
+          <a:p/>
+        </p:txBody>
       </p:sp>
       <p:sp>
         <p:nvSpPr>
@@ -19218,6 +19950,10 @@
             <a:prstDash val="solid"/>
           </a:ln>
         </p:spPr>
+        <p:txBody>
+          <a:bodyPr/>
+          <a:p/>
+        </p:txBody>
       </p:sp>
       <p:sp>
         <p:nvSpPr>
@@ -19243,6 +19979,10 @@
             <a:prstDash val="solid"/>
           </a:ln>
         </p:spPr>
+        <p:txBody>
+          <a:bodyPr/>
+          <a:p/>
+        </p:txBody>
       </p:sp>
       <p:sp>
         <p:nvSpPr>
@@ -19348,6 +20088,10 @@
             <a:prstDash val="solid"/>
           </a:ln>
         </p:spPr>
+        <p:txBody>
+          <a:bodyPr/>
+          <a:p/>
+        </p:txBody>
       </p:sp>
       <p:sp>
         <p:nvSpPr>
@@ -19373,6 +20117,10 @@
             <a:prstDash val="solid"/>
           </a:ln>
         </p:spPr>
+        <p:txBody>
+          <a:bodyPr/>
+          <a:p/>
+        </p:txBody>
       </p:sp>
       <p:sp>
         <p:nvSpPr>
@@ -19478,6 +20226,10 @@
             <a:prstDash val="solid"/>
           </a:ln>
         </p:spPr>
+        <p:txBody>
+          <a:bodyPr/>
+          <a:p/>
+        </p:txBody>
       </p:sp>
       <p:sp>
         <p:nvSpPr>
@@ -19503,6 +20255,10 @@
             <a:prstDash val="solid"/>
           </a:ln>
         </p:spPr>
+        <p:txBody>
+          <a:bodyPr/>
+          <a:p/>
+        </p:txBody>
       </p:sp>
       <p:sp>
         <p:nvSpPr>
@@ -19608,6 +20364,10 @@
             <a:prstDash val="solid"/>
           </a:ln>
         </p:spPr>
+        <p:txBody>
+          <a:bodyPr/>
+          <a:p/>
+        </p:txBody>
       </p:sp>
       <p:sp>
         <p:nvSpPr>
@@ -19633,6 +20393,10 @@
             <a:prstDash val="solid"/>
           </a:ln>
         </p:spPr>
+        <p:txBody>
+          <a:bodyPr/>
+          <a:p/>
+        </p:txBody>
       </p:sp>
       <p:sp>
         <p:nvSpPr>
@@ -19738,6 +20502,10 @@
             <a:prstDash val="solid"/>
           </a:ln>
         </p:spPr>
+        <p:txBody>
+          <a:bodyPr/>
+          <a:p/>
+        </p:txBody>
       </p:sp>
       <p:sp>
         <p:nvSpPr>
@@ -19763,6 +20531,10 @@
             <a:prstDash val="solid"/>
           </a:ln>
         </p:spPr>
+        <p:txBody>
+          <a:bodyPr/>
+          <a:p/>
+        </p:txBody>
       </p:sp>
       <p:sp>
         <p:nvSpPr>
@@ -19868,6 +20640,10 @@
             <a:prstDash val="solid"/>
           </a:ln>
         </p:spPr>
+        <p:txBody>
+          <a:bodyPr/>
+          <a:p/>
+        </p:txBody>
       </p:sp>
       <p:sp>
         <p:nvSpPr>
@@ -19893,6 +20669,10 @@
             <a:prstDash val="solid"/>
           </a:ln>
         </p:spPr>
+        <p:txBody>
+          <a:bodyPr/>
+          <a:p/>
+        </p:txBody>
       </p:sp>
       <p:sp>
         <p:nvSpPr>
@@ -19998,6 +20778,10 @@
             <a:prstDash val="solid"/>
           </a:ln>
         </p:spPr>
+        <p:txBody>
+          <a:bodyPr/>
+          <a:p/>
+        </p:txBody>
       </p:sp>
       <p:sp>
         <p:nvSpPr>
@@ -20023,6 +20807,10 @@
             <a:prstDash val="solid"/>
           </a:ln>
         </p:spPr>
+        <p:txBody>
+          <a:bodyPr/>
+          <a:p/>
+        </p:txBody>
       </p:sp>
       <p:sp>
         <p:nvSpPr>
@@ -20128,6 +20916,10 @@
             <a:prstDash val="solid"/>
           </a:ln>
         </p:spPr>
+        <p:txBody>
+          <a:bodyPr/>
+          <a:p/>
+        </p:txBody>
       </p:sp>
       <p:sp>
         <p:nvSpPr>
@@ -20336,6 +21128,10 @@
             <a:prstDash val="solid"/>
           </a:ln>
         </p:spPr>
+        <p:txBody>
+          <a:bodyPr/>
+          <a:p/>
+        </p:txBody>
       </p:sp>
       <p:sp>
         <p:nvSpPr>
@@ -20402,6 +21198,10 @@
             <a:prstDash val="solid"/>
           </a:ln>
         </p:spPr>
+        <p:txBody>
+          <a:bodyPr/>
+          <a:p/>
+        </p:txBody>
       </p:sp>
       <p:sp>
         <p:nvSpPr>
@@ -20507,6 +21307,10 @@
             <a:prstDash val="solid"/>
           </a:ln>
         </p:spPr>
+        <p:txBody>
+          <a:bodyPr/>
+          <a:p/>
+        </p:txBody>
       </p:sp>
       <p:sp>
         <p:nvSpPr>
@@ -20532,6 +21336,10 @@
             <a:prstDash val="solid"/>
           </a:ln>
         </p:spPr>
+        <p:txBody>
+          <a:bodyPr/>
+          <a:p/>
+        </p:txBody>
       </p:sp>
       <p:sp>
         <p:nvSpPr>
@@ -20637,6 +21445,10 @@
             <a:prstDash val="solid"/>
           </a:ln>
         </p:spPr>
+        <p:txBody>
+          <a:bodyPr/>
+          <a:p/>
+        </p:txBody>
       </p:sp>
       <p:sp>
         <p:nvSpPr>
@@ -20662,6 +21474,10 @@
             <a:prstDash val="solid"/>
           </a:ln>
         </p:spPr>
+        <p:txBody>
+          <a:bodyPr/>
+          <a:p/>
+        </p:txBody>
       </p:sp>
       <p:sp>
         <p:nvSpPr>
@@ -20806,6 +21622,10 @@
             <a:prstDash val="solid"/>
           </a:ln>
         </p:spPr>
+        <p:txBody>
+          <a:bodyPr/>
+          <a:p/>
+        </p:txBody>
       </p:sp>
       <p:sp>
         <p:nvSpPr>
@@ -20904,6 +21724,10 @@
             <a:prstDash val="solid"/>
           </a:ln>
         </p:spPr>
+        <p:txBody>
+          <a:bodyPr/>
+          <a:p/>
+        </p:txBody>
       </p:sp>
       <p:sp>
         <p:nvSpPr>
@@ -21048,6 +21872,10 @@
             <a:prstDash val="solid"/>
           </a:ln>
         </p:spPr>
+        <p:txBody>
+          <a:bodyPr/>
+          <a:p/>
+        </p:txBody>
       </p:sp>
       <p:sp>
         <p:nvSpPr>
@@ -21073,6 +21901,10 @@
             <a:prstDash val="solid"/>
           </a:ln>
         </p:spPr>
+        <p:txBody>
+          <a:bodyPr/>
+          <a:p/>
+        </p:txBody>
       </p:sp>
       <p:sp>
         <p:nvSpPr>
@@ -21178,6 +22010,10 @@
             <a:prstDash val="solid"/>
           </a:ln>
         </p:spPr>
+        <p:txBody>
+          <a:bodyPr/>
+          <a:p/>
+        </p:txBody>
       </p:sp>
       <p:sp>
         <p:nvSpPr>
@@ -21203,6 +22039,10 @@
             <a:prstDash val="solid"/>
           </a:ln>
         </p:spPr>
+        <p:txBody>
+          <a:bodyPr/>
+          <a:p/>
+        </p:txBody>
       </p:sp>
       <p:sp>
         <p:nvSpPr>
@@ -21308,6 +22148,10 @@
             <a:prstDash val="solid"/>
           </a:ln>
         </p:spPr>
+        <p:txBody>
+          <a:bodyPr/>
+          <a:p/>
+        </p:txBody>
       </p:sp>
       <p:sp>
         <p:nvSpPr>
@@ -21374,6 +22218,10 @@
             <a:prstDash val="solid"/>
           </a:ln>
         </p:spPr>
+        <p:txBody>
+          <a:bodyPr/>
+          <a:p/>
+        </p:txBody>
       </p:sp>
       <p:sp>
         <p:nvSpPr>
@@ -21472,6 +22320,10 @@
             <a:prstDash val="solid"/>
           </a:ln>
         </p:spPr>
+        <p:txBody>
+          <a:bodyPr/>
+          <a:p/>
+        </p:txBody>
       </p:sp>
       <p:sp>
         <p:nvSpPr>
@@ -21577,6 +22429,10 @@
             <a:prstDash val="solid"/>
           </a:ln>
         </p:spPr>
+        <p:txBody>
+          <a:bodyPr/>
+          <a:p/>
+        </p:txBody>
       </p:sp>
       <p:sp>
         <p:nvSpPr>
@@ -21648,6 +22504,10 @@
             </a:outerShdw>
           </a:effectLst>
         </p:spPr>
+        <p:txBody>
+          <a:bodyPr/>
+          <a:p/>
+        </p:txBody>
       </p:sp>
       <p:sp>
         <p:nvSpPr>
@@ -21962,6 +22822,10 @@
             <a:prstDash val="solid"/>
           </a:ln>
         </p:spPr>
+        <p:txBody>
+          <a:bodyPr/>
+          <a:p/>
+        </p:txBody>
       </p:sp>
       <p:sp>
         <p:nvSpPr>
@@ -22028,6 +22892,10 @@
             <a:prstDash val="solid"/>
           </a:ln>
         </p:spPr>
+        <p:txBody>
+          <a:bodyPr/>
+          <a:p/>
+        </p:txBody>
       </p:sp>
       <p:sp>
         <p:nvSpPr>
@@ -22282,6 +23150,10 @@
             <a:prstDash val="solid"/>
           </a:ln>
         </p:spPr>
+        <p:txBody>
+          <a:bodyPr/>
+          <a:p/>
+        </p:txBody>
       </p:sp>
       <p:sp>
         <p:nvSpPr>
@@ -22307,6 +23179,10 @@
             <a:prstDash val="solid"/>
           </a:ln>
         </p:spPr>
+        <p:txBody>
+          <a:bodyPr/>
+          <a:p/>
+        </p:txBody>
       </p:sp>
       <p:sp>
         <p:nvSpPr>
@@ -22412,6 +23288,10 @@
             <a:prstDash val="solid"/>
           </a:ln>
         </p:spPr>
+        <p:txBody>
+          <a:bodyPr/>
+          <a:p/>
+        </p:txBody>
       </p:sp>
       <p:sp>
         <p:nvSpPr>
@@ -22437,6 +23317,10 @@
             <a:prstDash val="solid"/>
           </a:ln>
         </p:spPr>
+        <p:txBody>
+          <a:bodyPr/>
+          <a:p/>
+        </p:txBody>
       </p:sp>
       <p:sp>
         <p:nvSpPr>
@@ -22542,6 +23426,10 @@
             <a:prstDash val="solid"/>
           </a:ln>
         </p:spPr>
+        <p:txBody>
+          <a:bodyPr/>
+          <a:p/>
+        </p:txBody>
       </p:sp>
       <p:sp>
         <p:nvSpPr>
@@ -22567,6 +23455,10 @@
             <a:prstDash val="solid"/>
           </a:ln>
         </p:spPr>
+        <p:txBody>
+          <a:bodyPr/>
+          <a:p/>
+        </p:txBody>
       </p:sp>
       <p:sp>
         <p:nvSpPr>
@@ -22672,6 +23564,10 @@
             <a:prstDash val="solid"/>
           </a:ln>
         </p:spPr>
+        <p:txBody>
+          <a:bodyPr/>
+          <a:p/>
+        </p:txBody>
       </p:sp>
       <p:sp>
         <p:nvSpPr>
@@ -22697,6 +23593,10 @@
             <a:prstDash val="solid"/>
           </a:ln>
         </p:spPr>
+        <p:txBody>
+          <a:bodyPr/>
+          <a:p/>
+        </p:txBody>
       </p:sp>
       <p:sp>
         <p:nvSpPr>
@@ -22802,6 +23702,10 @@
             <a:prstDash val="solid"/>
           </a:ln>
         </p:spPr>
+        <p:txBody>
+          <a:bodyPr/>
+          <a:p/>
+        </p:txBody>
       </p:sp>
       <p:sp>
         <p:nvSpPr>
@@ -22978,6 +23882,10 @@
             <a:prstDash val="solid"/>
           </a:ln>
         </p:spPr>
+        <p:txBody>
+          <a:bodyPr/>
+          <a:p/>
+        </p:txBody>
       </p:sp>
       <p:sp>
         <p:nvSpPr>
@@ -23122,6 +24030,10 @@
             <a:prstDash val="solid"/>
           </a:ln>
         </p:spPr>
+        <p:txBody>
+          <a:bodyPr/>
+          <a:p/>
+        </p:txBody>
       </p:sp>
       <p:sp>
         <p:nvSpPr>
@@ -23147,6 +24059,10 @@
             <a:prstDash val="solid"/>
           </a:ln>
         </p:spPr>
+        <p:txBody>
+          <a:bodyPr/>
+          <a:p/>
+        </p:txBody>
       </p:sp>
       <p:sp>
         <p:nvSpPr>
@@ -23252,6 +24168,10 @@
             <a:prstDash val="solid"/>
           </a:ln>
         </p:spPr>
+        <p:txBody>
+          <a:bodyPr/>
+          <a:p/>
+        </p:txBody>
       </p:sp>
       <p:sp>
         <p:nvSpPr>
@@ -23277,6 +24197,10 @@
             <a:prstDash val="solid"/>
           </a:ln>
         </p:spPr>
+        <p:txBody>
+          <a:bodyPr/>
+          <a:p/>
+        </p:txBody>
       </p:sp>
       <p:sp>
         <p:nvSpPr>
@@ -23382,6 +24306,10 @@
             <a:prstDash val="solid"/>
           </a:ln>
         </p:spPr>
+        <p:txBody>
+          <a:bodyPr/>
+          <a:p/>
+        </p:txBody>
       </p:sp>
       <p:sp>
         <p:nvSpPr>
@@ -23409,6 +24337,10 @@
             <a:prstDash val="solid"/>
           </a:ln>
         </p:spPr>
+        <p:txBody>
+          <a:bodyPr/>
+          <a:p/>
+        </p:txBody>
       </p:sp>
       <p:sp>
         <p:nvSpPr>
@@ -23434,6 +24366,10 @@
             <a:prstDash val="solid"/>
           </a:ln>
         </p:spPr>
+        <p:txBody>
+          <a:bodyPr/>
+          <a:p/>
+        </p:txBody>
       </p:sp>
       <p:sp>
         <p:nvSpPr>
@@ -23500,6 +24436,10 @@
             <a:prstDash val="solid"/>
           </a:ln>
         </p:spPr>
+        <p:txBody>
+          <a:bodyPr/>
+          <a:p/>
+        </p:txBody>
       </p:sp>
       <p:sp>
         <p:nvSpPr>
@@ -23637,6 +24577,10 @@
             <a:prstDash val="solid"/>
           </a:ln>
         </p:spPr>
+        <p:txBody>
+          <a:bodyPr/>
+          <a:p/>
+        </p:txBody>
       </p:sp>
       <p:sp>
         <p:nvSpPr>
@@ -23662,6 +24606,10 @@
             <a:prstDash val="solid"/>
           </a:ln>
         </p:spPr>
+        <p:txBody>
+          <a:bodyPr/>
+          <a:p/>
+        </p:txBody>
       </p:sp>
       <p:sp>
         <p:nvSpPr>
@@ -23682,6 +24630,10 @@
           </a:solidFill>
           <a:ln/>
         </p:spPr>
+        <p:txBody>
+          <a:bodyPr/>
+          <a:p/>
+        </p:txBody>
       </p:sp>
       <p:sp>
         <p:nvSpPr>
@@ -23826,6 +24778,10 @@
             <a:prstDash val="solid"/>
           </a:ln>
         </p:spPr>
+        <p:txBody>
+          <a:bodyPr/>
+          <a:p/>
+        </p:txBody>
       </p:sp>
       <p:sp>
         <p:nvSpPr>
@@ -23851,6 +24807,10 @@
             <a:prstDash val="solid"/>
           </a:ln>
         </p:spPr>
+        <p:txBody>
+          <a:bodyPr/>
+          <a:p/>
+        </p:txBody>
       </p:sp>
       <p:sp>
         <p:nvSpPr>
@@ -23871,6 +24831,10 @@
           </a:solidFill>
           <a:ln/>
         </p:spPr>
+        <p:txBody>
+          <a:bodyPr/>
+          <a:p/>
+        </p:txBody>
       </p:sp>
       <p:sp>
         <p:nvSpPr>
@@ -24015,6 +24979,10 @@
             <a:prstDash val="solid"/>
           </a:ln>
         </p:spPr>
+        <p:txBody>
+          <a:bodyPr/>
+          <a:p/>
+        </p:txBody>
       </p:sp>
       <p:sp>
         <p:nvSpPr>
@@ -24040,6 +25008,10 @@
             <a:prstDash val="solid"/>
           </a:ln>
         </p:spPr>
+        <p:txBody>
+          <a:bodyPr/>
+          <a:p/>
+        </p:txBody>
       </p:sp>
       <p:sp>
         <p:nvSpPr>
@@ -24060,6 +25032,10 @@
           </a:solidFill>
           <a:ln/>
         </p:spPr>
+        <p:txBody>
+          <a:bodyPr/>
+          <a:p/>
+        </p:txBody>
       </p:sp>
       <p:sp>
         <p:nvSpPr>
@@ -24204,6 +25180,10 @@
             <a:prstDash val="solid"/>
           </a:ln>
         </p:spPr>
+        <p:txBody>
+          <a:bodyPr/>
+          <a:p/>
+        </p:txBody>
       </p:sp>
       <p:sp>
         <p:nvSpPr>
@@ -24309,6 +25289,10 @@
             <a:prstDash val="solid"/>
           </a:ln>
         </p:spPr>
+        <p:txBody>
+          <a:bodyPr/>
+          <a:p/>
+        </p:txBody>
       </p:sp>
       <p:sp>
         <p:nvSpPr>
@@ -24563,6 +25547,10 @@
             <a:prstDash val="solid"/>
           </a:ln>
         </p:spPr>
+        <p:txBody>
+          <a:bodyPr/>
+          <a:p/>
+        </p:txBody>
       </p:sp>
       <p:sp>
         <p:nvSpPr>
@@ -24588,6 +25576,10 @@
             <a:prstDash val="solid"/>
           </a:ln>
         </p:spPr>
+        <p:txBody>
+          <a:bodyPr/>
+          <a:p/>
+        </p:txBody>
       </p:sp>
       <p:sp>
         <p:nvSpPr>
@@ -24693,6 +25685,10 @@
             <a:prstDash val="solid"/>
           </a:ln>
         </p:spPr>
+        <p:txBody>
+          <a:bodyPr/>
+          <a:p/>
+        </p:txBody>
       </p:sp>
       <p:sp>
         <p:nvSpPr>
@@ -24718,6 +25714,10 @@
             <a:prstDash val="solid"/>
           </a:ln>
         </p:spPr>
+        <p:txBody>
+          <a:bodyPr/>
+          <a:p/>
+        </p:txBody>
       </p:sp>
       <p:sp>
         <p:nvSpPr>
@@ -24823,6 +25823,10 @@
             <a:prstDash val="solid"/>
           </a:ln>
         </p:spPr>
+        <p:txBody>
+          <a:bodyPr/>
+          <a:p/>
+        </p:txBody>
       </p:sp>
       <p:sp>
         <p:nvSpPr>
@@ -24848,6 +25852,10 @@
             <a:prstDash val="solid"/>
           </a:ln>
         </p:spPr>
+        <p:txBody>
+          <a:bodyPr/>
+          <a:p/>
+        </p:txBody>
       </p:sp>
       <p:sp>
         <p:nvSpPr>
@@ -24992,6 +26000,10 @@
             <a:prstDash val="solid"/>
           </a:ln>
         </p:spPr>
+        <p:txBody>
+          <a:bodyPr/>
+          <a:p/>
+        </p:txBody>
       </p:sp>
       <p:sp>
         <p:nvSpPr>
@@ -25097,6 +26109,10 @@
             <a:prstDash val="solid"/>
           </a:ln>
         </p:spPr>
+        <p:txBody>
+          <a:bodyPr/>
+          <a:p/>
+        </p:txBody>
       </p:sp>
       <p:sp>
         <p:nvSpPr>
@@ -25202,6 +26218,10 @@
             <a:prstDash val="solid"/>
           </a:ln>
         </p:spPr>
+        <p:txBody>
+          <a:bodyPr/>
+          <a:p/>
+        </p:txBody>
       </p:sp>
       <p:sp>
         <p:nvSpPr>
@@ -25339,6 +26359,10 @@
             <a:prstDash val="solid"/>
           </a:ln>
         </p:spPr>
+        <p:txBody>
+          <a:bodyPr/>
+          <a:p/>
+        </p:txBody>
       </p:sp>
       <p:sp>
         <p:nvSpPr>
@@ -25483,6 +26507,10 @@
             <a:prstDash val="solid"/>
           </a:ln>
         </p:spPr>
+        <p:txBody>
+          <a:bodyPr/>
+          <a:p/>
+        </p:txBody>
       </p:sp>
       <p:sp>
         <p:nvSpPr>
@@ -25510,6 +26538,10 @@
             <a:prstDash val="solid"/>
           </a:ln>
         </p:spPr>
+        <p:txBody>
+          <a:bodyPr/>
+          <a:p/>
+        </p:txBody>
       </p:sp>
       <p:sp>
         <p:nvSpPr>
@@ -25535,6 +26567,10 @@
             <a:prstDash val="solid"/>
           </a:ln>
         </p:spPr>
+        <p:txBody>
+          <a:bodyPr/>
+          <a:p/>
+        </p:txBody>
       </p:sp>
       <p:sp>
         <p:nvSpPr>
@@ -25716,6 +26752,10 @@
             </a:outerShdw>
           </a:effectLst>
         </p:spPr>
+        <p:txBody>
+          <a:bodyPr/>
+          <a:p/>
+        </p:txBody>
       </p:sp>
       <p:sp>
         <p:nvSpPr>
@@ -25780,6 +26820,10 @@
             <a:prstDash val="solid"/>
           </a:ln>
         </p:spPr>
+        <p:txBody>
+          <a:bodyPr/>
+          <a:p/>
+        </p:txBody>
       </p:sp>
       <p:sp>
         <p:nvSpPr>
@@ -25805,6 +26849,10 @@
             <a:prstDash val="solid"/>
           </a:ln>
         </p:spPr>
+        <p:txBody>
+          <a:bodyPr/>
+          <a:p/>
+        </p:txBody>
       </p:sp>
       <p:sp>
         <p:nvSpPr>
@@ -25828,6 +26876,10 @@
             <a:prstDash val="solid"/>
           </a:ln>
         </p:spPr>
+        <p:txBody>
+          <a:bodyPr/>
+          <a:p/>
+        </p:txBody>
       </p:sp>
       <p:sp>
         <p:nvSpPr>
@@ -25851,6 +26903,10 @@
             <a:prstDash val="solid"/>
           </a:ln>
         </p:spPr>
+        <p:txBody>
+          <a:bodyPr/>
+          <a:p/>
+        </p:txBody>
       </p:sp>
       <p:sp>
         <p:nvSpPr>
@@ -25876,6 +26932,10 @@
             <a:prstDash val="solid"/>
           </a:ln>
         </p:spPr>
+        <p:txBody>
+          <a:bodyPr/>
+          <a:p/>
+        </p:txBody>
       </p:sp>
       <p:sp>
         <p:nvSpPr>
@@ -25899,6 +26959,10 @@
             <a:prstDash val="solid"/>
           </a:ln>
         </p:spPr>
+        <p:txBody>
+          <a:bodyPr/>
+          <a:p/>
+        </p:txBody>
       </p:sp>
       <p:sp>
         <p:nvSpPr>
@@ -25922,6 +26986,10 @@
             <a:prstDash val="solid"/>
           </a:ln>
         </p:spPr>
+        <p:txBody>
+          <a:bodyPr/>
+          <a:p/>
+        </p:txBody>
       </p:sp>
       <p:sp>
         <p:nvSpPr>
@@ -25947,6 +27015,10 @@
             <a:prstDash val="solid"/>
           </a:ln>
         </p:spPr>
+        <p:txBody>
+          <a:bodyPr/>
+          <a:p/>
+        </p:txBody>
       </p:sp>
       <p:sp>
         <p:nvSpPr>
@@ -25970,6 +27042,10 @@
             <a:prstDash val="solid"/>
           </a:ln>
         </p:spPr>
+        <p:txBody>
+          <a:bodyPr/>
+          <a:p/>
+        </p:txBody>
       </p:sp>
       <p:sp>
         <p:nvSpPr>
@@ -25993,6 +27069,10 @@
             <a:prstDash val="solid"/>
           </a:ln>
         </p:spPr>
+        <p:txBody>
+          <a:bodyPr/>
+          <a:p/>
+        </p:txBody>
       </p:sp>
       <p:sp>
         <p:nvSpPr>
@@ -26018,6 +27098,10 @@
             <a:prstDash val="solid"/>
           </a:ln>
         </p:spPr>
+        <p:txBody>
+          <a:bodyPr/>
+          <a:p/>
+        </p:txBody>
       </p:sp>
       <p:sp>
         <p:nvSpPr>
@@ -26041,6 +27125,10 @@
             <a:prstDash val="solid"/>
           </a:ln>
         </p:spPr>
+        <p:txBody>
+          <a:bodyPr/>
+          <a:p/>
+        </p:txBody>
       </p:sp>
       <p:sp>
         <p:nvSpPr>
@@ -26064,6 +27152,10 @@
             <a:prstDash val="solid"/>
           </a:ln>
         </p:spPr>
+        <p:txBody>
+          <a:bodyPr/>
+          <a:p/>
+        </p:txBody>
       </p:sp>
       <p:sp>
         <p:nvSpPr>
@@ -26089,6 +27181,10 @@
             <a:prstDash val="solid"/>
           </a:ln>
         </p:spPr>
+        <p:txBody>
+          <a:bodyPr/>
+          <a:p/>
+        </p:txBody>
       </p:sp>
       <p:sp>
         <p:nvSpPr>
@@ -26112,6 +27208,10 @@
             <a:prstDash val="solid"/>
           </a:ln>
         </p:spPr>
+        <p:txBody>
+          <a:bodyPr/>
+          <a:p/>
+        </p:txBody>
       </p:sp>
       <p:sp>
         <p:nvSpPr>
@@ -26135,6 +27235,10 @@
             <a:prstDash val="solid"/>
           </a:ln>
         </p:spPr>
+        <p:txBody>
+          <a:bodyPr/>
+          <a:p/>
+        </p:txBody>
       </p:sp>
       <p:sp>
         <p:nvSpPr>
@@ -26160,6 +27264,10 @@
             <a:prstDash val="solid"/>
           </a:ln>
         </p:spPr>
+        <p:txBody>
+          <a:bodyPr/>
+          <a:p/>
+        </p:txBody>
       </p:sp>
       <p:sp>
         <p:nvSpPr>
@@ -26183,6 +27291,10 @@
             <a:prstDash val="solid"/>
           </a:ln>
         </p:spPr>
+        <p:txBody>
+          <a:bodyPr/>
+          <a:p/>
+        </p:txBody>
       </p:sp>
       <p:sp>
         <p:nvSpPr>
@@ -26206,6 +27318,10 @@
             <a:prstDash val="solid"/>
           </a:ln>
         </p:spPr>
+        <p:txBody>
+          <a:bodyPr/>
+          <a:p/>
+        </p:txBody>
       </p:sp>
       <p:sp>
         <p:nvSpPr>
@@ -26231,6 +27347,10 @@
             <a:prstDash val="solid"/>
           </a:ln>
         </p:spPr>
+        <p:txBody>
+          <a:bodyPr/>
+          <a:p/>
+        </p:txBody>
       </p:sp>
       <p:sp>
         <p:nvSpPr>
@@ -26254,6 +27374,10 @@
             <a:prstDash val="solid"/>
           </a:ln>
         </p:spPr>
+        <p:txBody>
+          <a:bodyPr/>
+          <a:p/>
+        </p:txBody>
       </p:sp>
       <p:sp>
         <p:nvSpPr>
@@ -26277,6 +27401,10 @@
             <a:prstDash val="solid"/>
           </a:ln>
         </p:spPr>
+        <p:txBody>
+          <a:bodyPr/>
+          <a:p/>
+        </p:txBody>
       </p:sp>
       <p:sp>
         <p:nvSpPr>
@@ -26302,6 +27430,10 @@
             <a:prstDash val="solid"/>
           </a:ln>
         </p:spPr>
+        <p:txBody>
+          <a:bodyPr/>
+          <a:p/>
+        </p:txBody>
       </p:sp>
       <p:sp>
         <p:nvSpPr>
@@ -26325,6 +27457,10 @@
             <a:prstDash val="solid"/>
           </a:ln>
         </p:spPr>
+        <p:txBody>
+          <a:bodyPr/>
+          <a:p/>
+        </p:txBody>
       </p:sp>
       <p:sp>
         <p:nvSpPr>
@@ -26348,6 +27484,10 @@
             <a:prstDash val="solid"/>
           </a:ln>
         </p:spPr>
+        <p:txBody>
+          <a:bodyPr/>
+          <a:p/>
+        </p:txBody>
       </p:sp>
       <p:sp>
         <p:nvSpPr>
@@ -26373,6 +27513,10 @@
             <a:prstDash val="solid"/>
           </a:ln>
         </p:spPr>
+        <p:txBody>
+          <a:bodyPr/>
+          <a:p/>
+        </p:txBody>
       </p:sp>
       <p:sp>
         <p:nvSpPr>
@@ -26396,6 +27540,10 @@
             <a:prstDash val="solid"/>
           </a:ln>
         </p:spPr>
+        <p:txBody>
+          <a:bodyPr/>
+          <a:p/>
+        </p:txBody>
       </p:sp>
       <p:sp>
         <p:nvSpPr>
@@ -26419,6 +27567,10 @@
             <a:prstDash val="solid"/>
           </a:ln>
         </p:spPr>
+        <p:txBody>
+          <a:bodyPr/>
+          <a:p/>
+        </p:txBody>
       </p:sp>
       <p:sp>
         <p:nvSpPr>
@@ -26444,6 +27596,10 @@
             <a:prstDash val="solid"/>
           </a:ln>
         </p:spPr>
+        <p:txBody>
+          <a:bodyPr/>
+          <a:p/>
+        </p:txBody>
       </p:sp>
       <p:sp>
         <p:nvSpPr>
@@ -26467,6 +27623,10 @@
             <a:prstDash val="solid"/>
           </a:ln>
         </p:spPr>
+        <p:txBody>
+          <a:bodyPr/>
+          <a:p/>
+        </p:txBody>
       </p:sp>
       <p:sp>
         <p:nvSpPr>
@@ -26490,6 +27650,10 @@
             <a:prstDash val="solid"/>
           </a:ln>
         </p:spPr>
+        <p:txBody>
+          <a:bodyPr/>
+          <a:p/>
+        </p:txBody>
       </p:sp>
       <p:sp>
         <p:nvSpPr>
@@ -26515,6 +27679,10 @@
             <a:prstDash val="solid"/>
           </a:ln>
         </p:spPr>
+        <p:txBody>
+          <a:bodyPr/>
+          <a:p/>
+        </p:txBody>
       </p:sp>
       <p:sp>
         <p:nvSpPr>
@@ -26538,6 +27706,10 @@
             <a:prstDash val="solid"/>
           </a:ln>
         </p:spPr>
+        <p:txBody>
+          <a:bodyPr/>
+          <a:p/>
+        </p:txBody>
       </p:sp>
       <p:sp>
         <p:nvSpPr>
@@ -26561,6 +27733,10 @@
             <a:prstDash val="solid"/>
           </a:ln>
         </p:spPr>
+        <p:txBody>
+          <a:bodyPr/>
+          <a:p/>
+        </p:txBody>
       </p:sp>
       <p:sp>
         <p:nvSpPr>
@@ -26586,6 +27762,10 @@
             <a:prstDash val="solid"/>
           </a:ln>
         </p:spPr>
+        <p:txBody>
+          <a:bodyPr/>
+          <a:p/>
+        </p:txBody>
       </p:sp>
       <p:sp>
         <p:nvSpPr>
@@ -26611,6 +27791,10 @@
             <a:prstDash val="solid"/>
           </a:ln>
         </p:spPr>
+        <p:txBody>
+          <a:bodyPr/>
+          <a:p/>
+        </p:txBody>
       </p:sp>
       <p:sp>
         <p:nvSpPr>
@@ -26636,6 +27820,10 @@
             <a:prstDash val="solid"/>
           </a:ln>
         </p:spPr>
+        <p:txBody>
+          <a:bodyPr/>
+          <a:p/>
+        </p:txBody>
       </p:sp>
       <p:sp>
         <p:nvSpPr>
@@ -26847,6 +28035,10 @@
             <a:prstDash val="solid"/>
           </a:ln>
         </p:spPr>
+        <p:txBody>
+          <a:bodyPr/>
+          <a:p/>
+        </p:txBody>
       </p:sp>
       <p:sp>
         <p:nvSpPr>
@@ -27062,6 +28254,10 @@
             <a:prstDash val="solid"/>
           </a:ln>
         </p:spPr>
+        <p:txBody>
+          <a:bodyPr/>
+          <a:p/>
+        </p:txBody>
       </p:sp>
       <p:sp>
         <p:nvSpPr>
@@ -27087,6 +28283,10 @@
             <a:prstDash val="solid"/>
           </a:ln>
         </p:spPr>
+        <p:txBody>
+          <a:bodyPr/>
+          <a:p/>
+        </p:txBody>
       </p:sp>
       <p:sp>
         <p:nvSpPr>
@@ -27192,6 +28392,10 @@
             <a:prstDash val="solid"/>
           </a:ln>
         </p:spPr>
+        <p:txBody>
+          <a:bodyPr/>
+          <a:p/>
+        </p:txBody>
       </p:sp>
       <p:sp>
         <p:nvSpPr>
@@ -27217,6 +28421,10 @@
             <a:prstDash val="solid"/>
           </a:ln>
         </p:spPr>
+        <p:txBody>
+          <a:bodyPr/>
+          <a:p/>
+        </p:txBody>
       </p:sp>
       <p:sp>
         <p:nvSpPr>
@@ -27322,6 +28530,10 @@
             <a:prstDash val="solid"/>
           </a:ln>
         </p:spPr>
+        <p:txBody>
+          <a:bodyPr/>
+          <a:p/>
+        </p:txBody>
       </p:sp>
       <p:sp>
         <p:nvSpPr>
@@ -27347,6 +28559,10 @@
             <a:prstDash val="solid"/>
           </a:ln>
         </p:spPr>
+        <p:txBody>
+          <a:bodyPr/>
+          <a:p/>
+        </p:txBody>
       </p:sp>
       <p:sp>
         <p:nvSpPr>
@@ -27452,6 +28668,10 @@
             <a:prstDash val="solid"/>
           </a:ln>
         </p:spPr>
+        <p:txBody>
+          <a:bodyPr/>
+          <a:p/>
+        </p:txBody>
       </p:sp>
       <p:sp>
         <p:nvSpPr>
@@ -27477,6 +28697,10 @@
             <a:prstDash val="solid"/>
           </a:ln>
         </p:spPr>
+        <p:txBody>
+          <a:bodyPr/>
+          <a:p/>
+        </p:txBody>
       </p:sp>
       <p:sp>
         <p:nvSpPr>
@@ -27582,6 +28806,10 @@
             <a:prstDash val="solid"/>
           </a:ln>
         </p:spPr>
+        <p:txBody>
+          <a:bodyPr/>
+          <a:p/>
+        </p:txBody>
       </p:sp>
       <p:sp>
         <p:nvSpPr>
@@ -27648,6 +28876,10 @@
             <a:prstDash val="solid"/>
           </a:ln>
         </p:spPr>
+        <p:txBody>
+          <a:bodyPr/>
+          <a:p/>
+        </p:txBody>
       </p:sp>
       <p:sp>
         <p:nvSpPr>
@@ -27824,6 +29056,10 @@
             <a:prstDash val="solid"/>
           </a:ln>
         </p:spPr>
+        <p:txBody>
+          <a:bodyPr/>
+          <a:p/>
+        </p:txBody>
       </p:sp>
       <p:sp>
         <p:nvSpPr>
@@ -27849,6 +29085,10 @@
             <a:prstDash val="solid"/>
           </a:ln>
         </p:spPr>
+        <p:txBody>
+          <a:bodyPr/>
+          <a:p/>
+        </p:txBody>
       </p:sp>
       <p:sp>
         <p:nvSpPr>
@@ -27869,6 +29109,10 @@
           </a:solidFill>
           <a:ln/>
         </p:spPr>
+        <p:txBody>
+          <a:bodyPr/>
+          <a:p/>
+        </p:txBody>
       </p:sp>
       <p:sp>
         <p:nvSpPr>
@@ -28013,6 +29257,10 @@
             <a:prstDash val="solid"/>
           </a:ln>
         </p:spPr>
+        <p:txBody>
+          <a:bodyPr/>
+          <a:p/>
+        </p:txBody>
       </p:sp>
       <p:sp>
         <p:nvSpPr>
@@ -28038,6 +29286,10 @@
             <a:prstDash val="solid"/>
           </a:ln>
         </p:spPr>
+        <p:txBody>
+          <a:bodyPr/>
+          <a:p/>
+        </p:txBody>
       </p:sp>
       <p:sp>
         <p:nvSpPr>
@@ -28058,6 +29310,10 @@
           </a:solidFill>
           <a:ln/>
         </p:spPr>
+        <p:txBody>
+          <a:bodyPr/>
+          <a:p/>
+        </p:txBody>
       </p:sp>
       <p:sp>
         <p:nvSpPr>
@@ -28202,6 +29458,10 @@
             <a:prstDash val="solid"/>
           </a:ln>
         </p:spPr>
+        <p:txBody>
+          <a:bodyPr/>
+          <a:p/>
+        </p:txBody>
       </p:sp>
       <p:sp>
         <p:nvSpPr>
@@ -28227,6 +29487,10 @@
             <a:prstDash val="solid"/>
           </a:ln>
         </p:spPr>
+        <p:txBody>
+          <a:bodyPr/>
+          <a:p/>
+        </p:txBody>
       </p:sp>
       <p:sp>
         <p:nvSpPr>
@@ -28247,6 +29511,10 @@
           </a:solidFill>
           <a:ln/>
         </p:spPr>
+        <p:txBody>
+          <a:bodyPr/>
+          <a:p/>
+        </p:txBody>
       </p:sp>
       <p:sp>
         <p:nvSpPr>
@@ -28391,6 +29659,10 @@
             <a:prstDash val="solid"/>
           </a:ln>
         </p:spPr>
+        <p:txBody>
+          <a:bodyPr/>
+          <a:p/>
+        </p:txBody>
       </p:sp>
       <p:sp>
         <p:nvSpPr>
@@ -28416,6 +29688,10 @@
             <a:prstDash val="solid"/>
           </a:ln>
         </p:spPr>
+        <p:txBody>
+          <a:bodyPr/>
+          <a:p/>
+        </p:txBody>
       </p:sp>
       <p:sp>
         <p:nvSpPr>
@@ -28436,6 +29712,10 @@
           </a:solidFill>
           <a:ln/>
         </p:spPr>
+        <p:txBody>
+          <a:bodyPr/>
+          <a:p/>
+        </p:txBody>
       </p:sp>
       <p:sp>
         <p:nvSpPr>
@@ -28580,6 +29860,10 @@
             <a:prstDash val="solid"/>
           </a:ln>
         </p:spPr>
+        <p:txBody>
+          <a:bodyPr/>
+          <a:p/>
+        </p:txBody>
       </p:sp>
       <p:sp>
         <p:nvSpPr>
@@ -28605,6 +29889,10 @@
             <a:prstDash val="solid"/>
           </a:ln>
         </p:spPr>
+        <p:txBody>
+          <a:bodyPr/>
+          <a:p/>
+        </p:txBody>
       </p:sp>
       <p:sp>
         <p:nvSpPr>
@@ -28625,6 +29913,10 @@
           </a:solidFill>
           <a:ln/>
         </p:spPr>
+        <p:txBody>
+          <a:bodyPr/>
+          <a:p/>
+        </p:txBody>
       </p:sp>
       <p:sp>
         <p:nvSpPr>
@@ -28801,6 +30093,10 @@
             <a:prstDash val="solid"/>
           </a:ln>
         </p:spPr>
+        <p:txBody>
+          <a:bodyPr/>
+          <a:p/>
+        </p:txBody>
       </p:sp>
       <p:sp>
         <p:nvSpPr>
@@ -28984,6 +30280,10 @@
             <a:prstDash val="solid"/>
           </a:ln>
         </p:spPr>
+        <p:txBody>
+          <a:bodyPr/>
+          <a:p/>
+        </p:txBody>
       </p:sp>
       <p:sp>
         <p:nvSpPr>
@@ -29121,6 +30421,10 @@
             <a:prstDash val="solid"/>
           </a:ln>
         </p:spPr>
+        <p:txBody>
+          <a:bodyPr/>
+          <a:p/>
+        </p:txBody>
       </p:sp>
       <p:sp>
         <p:nvSpPr>
@@ -29219,6 +30523,10 @@
           </a:solidFill>
           <a:ln/>
         </p:spPr>
+        <p:txBody>
+          <a:bodyPr/>
+          <a:p/>
+        </p:txBody>
       </p:sp>
       <p:sp>
         <p:nvSpPr>
@@ -29317,6 +30625,10 @@
           </a:solidFill>
           <a:ln/>
         </p:spPr>
+        <p:txBody>
+          <a:bodyPr/>
+          <a:p/>
+        </p:txBody>
       </p:sp>
       <p:sp>
         <p:nvSpPr>
@@ -29415,6 +30727,10 @@
           </a:solidFill>
           <a:ln/>
         </p:spPr>
+        <p:txBody>
+          <a:bodyPr/>
+          <a:p/>
+        </p:txBody>
       </p:sp>
       <p:sp>
         <p:nvSpPr>
@@ -29520,6 +30836,10 @@
             <a:prstDash val="solid"/>
           </a:ln>
         </p:spPr>
+        <p:txBody>
+          <a:bodyPr/>
+          <a:p/>
+        </p:txBody>
       </p:sp>
       <p:sp>
         <p:nvSpPr>
@@ -29547,6 +30867,10 @@
             <a:prstDash val="solid"/>
           </a:ln>
         </p:spPr>
+        <p:txBody>
+          <a:bodyPr/>
+          <a:p/>
+        </p:txBody>
       </p:sp>
       <p:sp>
         <p:nvSpPr>
@@ -29572,6 +30896,10 @@
             <a:prstDash val="solid"/>
           </a:ln>
         </p:spPr>
+        <p:txBody>
+          <a:bodyPr/>
+          <a:p/>
+        </p:txBody>
       </p:sp>
       <p:sp>
         <p:nvSpPr>
@@ -29709,6 +31037,10 @@
             <a:prstDash val="solid"/>
           </a:ln>
         </p:spPr>
+        <p:txBody>
+          <a:bodyPr/>
+          <a:p/>
+        </p:txBody>
       </p:sp>
       <p:sp>
         <p:nvSpPr>
@@ -29853,6 +31185,10 @@
             <a:prstDash val="solid"/>
           </a:ln>
         </p:spPr>
+        <p:txBody>
+          <a:bodyPr/>
+          <a:p/>
+        </p:txBody>
       </p:sp>
       <p:sp>
         <p:nvSpPr>
@@ -29873,6 +31209,10 @@
           </a:solidFill>
           <a:ln/>
         </p:spPr>
+        <p:txBody>
+          <a:bodyPr/>
+          <a:p/>
+        </p:txBody>
       </p:sp>
       <p:sp>
         <p:nvSpPr>
@@ -29978,6 +31318,10 @@
             <a:prstDash val="solid"/>
           </a:ln>
         </p:spPr>
+        <p:txBody>
+          <a:bodyPr/>
+          <a:p/>
+        </p:txBody>
       </p:sp>
       <p:sp>
         <p:nvSpPr>
@@ -29998,6 +31342,10 @@
           </a:solidFill>
           <a:ln/>
         </p:spPr>
+        <p:txBody>
+          <a:bodyPr/>
+          <a:p/>
+        </p:txBody>
       </p:sp>
       <p:sp>
         <p:nvSpPr>
@@ -30103,6 +31451,10 @@
             <a:prstDash val="solid"/>
           </a:ln>
         </p:spPr>
+        <p:txBody>
+          <a:bodyPr/>
+          <a:p/>
+        </p:txBody>
       </p:sp>
       <p:sp>
         <p:nvSpPr>
@@ -30123,6 +31475,10 @@
           </a:solidFill>
           <a:ln/>
         </p:spPr>
+        <p:txBody>
+          <a:bodyPr/>
+          <a:p/>
+        </p:txBody>
       </p:sp>
       <p:sp>
         <p:nvSpPr>
@@ -30228,6 +31584,10 @@
             <a:prstDash val="solid"/>
           </a:ln>
         </p:spPr>
+        <p:txBody>
+          <a:bodyPr/>
+          <a:p/>
+        </p:txBody>
       </p:sp>
       <p:sp>
         <p:nvSpPr>
@@ -30248,6 +31608,10 @@
           </a:solidFill>
           <a:ln/>
         </p:spPr>
+        <p:txBody>
+          <a:bodyPr/>
+          <a:p/>
+        </p:txBody>
       </p:sp>
       <p:sp>
         <p:nvSpPr>
@@ -30353,6 +31717,10 @@
             <a:prstDash val="solid"/>
           </a:ln>
         </p:spPr>
+        <p:txBody>
+          <a:bodyPr/>
+          <a:p/>
+        </p:txBody>
       </p:sp>
       <p:sp>
         <p:nvSpPr>
@@ -30373,6 +31741,10 @@
           </a:solidFill>
           <a:ln/>
         </p:spPr>
+        <p:txBody>
+          <a:bodyPr/>
+          <a:p/>
+        </p:txBody>
       </p:sp>
       <p:sp>
         <p:nvSpPr>
@@ -30478,6 +31850,10 @@
             <a:prstDash val="solid"/>
           </a:ln>
         </p:spPr>
+        <p:txBody>
+          <a:bodyPr/>
+          <a:p/>
+        </p:txBody>
       </p:sp>
       <p:sp>
         <p:nvSpPr>
@@ -30505,6 +31881,10 @@
             <a:prstDash val="solid"/>
           </a:ln>
         </p:spPr>
+        <p:txBody>
+          <a:bodyPr/>
+          <a:p/>
+        </p:txBody>
       </p:sp>
       <p:sp>
         <p:nvSpPr>
@@ -30530,6 +31910,10 @@
             <a:prstDash val="solid"/>
           </a:ln>
         </p:spPr>
+        <p:txBody>
+          <a:bodyPr/>
+          <a:p/>
+        </p:txBody>
       </p:sp>
       <p:sp>
         <p:nvSpPr>
@@ -30784,6 +32168,10 @@
             <a:prstDash val="solid"/>
           </a:ln>
         </p:spPr>
+        <p:txBody>
+          <a:bodyPr/>
+          <a:p/>
+        </p:txBody>
       </p:sp>
       <p:sp>
         <p:nvSpPr>
@@ -30804,6 +32192,10 @@
           </a:solidFill>
           <a:ln/>
         </p:spPr>
+        <p:txBody>
+          <a:bodyPr/>
+          <a:p/>
+        </p:txBody>
       </p:sp>
       <p:sp>
         <p:nvSpPr>
@@ -30909,6 +32301,10 @@
             <a:prstDash val="solid"/>
           </a:ln>
         </p:spPr>
+        <p:txBody>
+          <a:bodyPr/>
+          <a:p/>
+        </p:txBody>
       </p:sp>
       <p:sp>
         <p:nvSpPr>
@@ -30929,6 +32325,10 @@
           </a:solidFill>
           <a:ln/>
         </p:spPr>
+        <p:txBody>
+          <a:bodyPr/>
+          <a:p/>
+        </p:txBody>
       </p:sp>
       <p:sp>
         <p:nvSpPr>
@@ -31034,6 +32434,10 @@
             <a:prstDash val="solid"/>
           </a:ln>
         </p:spPr>
+        <p:txBody>
+          <a:bodyPr/>
+          <a:p/>
+        </p:txBody>
       </p:sp>
       <p:sp>
         <p:nvSpPr>
@@ -31054,6 +32458,10 @@
           </a:solidFill>
           <a:ln/>
         </p:spPr>
+        <p:txBody>
+          <a:bodyPr/>
+          <a:p/>
+        </p:txBody>
       </p:sp>
       <p:sp>
         <p:nvSpPr>
@@ -31159,6 +32567,10 @@
             <a:prstDash val="solid"/>
           </a:ln>
         </p:spPr>
+        <p:txBody>
+          <a:bodyPr/>
+          <a:p/>
+        </p:txBody>
       </p:sp>
       <p:sp>
         <p:nvSpPr>
@@ -31179,6 +32591,10 @@
           </a:solidFill>
           <a:ln/>
         </p:spPr>
+        <p:txBody>
+          <a:bodyPr/>
+          <a:p/>
+        </p:txBody>
       </p:sp>
       <p:sp>
         <p:nvSpPr>
@@ -31284,6 +32700,10 @@
             <a:prstDash val="solid"/>
           </a:ln>
         </p:spPr>
+        <p:txBody>
+          <a:bodyPr/>
+          <a:p/>
+        </p:txBody>
       </p:sp>
       <p:sp>
         <p:nvSpPr>
@@ -31304,6 +32724,10 @@
           </a:solidFill>
           <a:ln/>
         </p:spPr>
+        <p:txBody>
+          <a:bodyPr/>
+          <a:p/>
+        </p:txBody>
       </p:sp>
       <p:sp>
         <p:nvSpPr>
@@ -31409,6 +32833,10 @@
             <a:prstDash val="solid"/>
           </a:ln>
         </p:spPr>
+        <p:txBody>
+          <a:bodyPr/>
+          <a:p/>
+        </p:txBody>
       </p:sp>
       <p:sp>
         <p:nvSpPr>
@@ -31429,6 +32857,10 @@
           </a:solidFill>
           <a:ln/>
         </p:spPr>
+        <p:txBody>
+          <a:bodyPr/>
+          <a:p/>
+        </p:txBody>
       </p:sp>
       <p:sp>
         <p:nvSpPr>
@@ -31534,6 +32966,10 @@
             <a:prstDash val="solid"/>
           </a:ln>
         </p:spPr>
+        <p:txBody>
+          <a:bodyPr/>
+          <a:p/>
+        </p:txBody>
       </p:sp>
       <p:sp>
         <p:nvSpPr>
@@ -31632,6 +33068,10 @@
             <a:prstDash val="solid"/>
           </a:ln>
         </p:spPr>
+        <p:txBody>
+          <a:bodyPr/>
+          <a:p/>
+        </p:txBody>
       </p:sp>
       <p:sp>
         <p:nvSpPr>
@@ -31783,7 +33223,7 @@
                 <a:ea typeface="Palatino Linotype" pitchFamily="34" charset="-122"/>
                 <a:cs typeface="Palatino Linotype" pitchFamily="34" charset="-120"/>
               </a:rPr>
-              <a:t>S-a lovit la cap. Medicul de gardă a cerut o tomografie.</a:t>
+              <a:t>S-a lovit la cap. Medicul de gardă a cerut un examen prin tomografie computerizată (CT).</a:t>
             </a:r>
             <a:endParaRPr lang="en-US" sz="2200" dirty="0"/>
           </a:p>
@@ -31893,6 +33333,10 @@
             <a:prstDash val="solid"/>
           </a:ln>
         </p:spPr>
+        <p:txBody>
+          <a:bodyPr/>
+          <a:p/>
+        </p:txBody>
       </p:sp>
       <p:sp>
         <p:nvSpPr>
@@ -31918,6 +33362,10 @@
             <a:prstDash val="solid"/>
           </a:ln>
         </p:spPr>
+        <p:txBody>
+          <a:bodyPr/>
+          <a:p/>
+        </p:txBody>
       </p:sp>
       <p:sp>
         <p:nvSpPr>
@@ -31984,6 +33432,10 @@
             <a:prstDash val="solid"/>
           </a:ln>
         </p:spPr>
+        <p:txBody>
+          <a:bodyPr/>
+          <a:p/>
+        </p:txBody>
       </p:sp>
       <p:sp>
         <p:nvSpPr>
@@ -32238,6 +33690,10 @@
             <a:prstDash val="solid"/>
           </a:ln>
         </p:spPr>
+        <p:txBody>
+          <a:bodyPr/>
+          <a:p/>
+        </p:txBody>
       </p:sp>
       <p:sp>
         <p:nvSpPr>
@@ -32263,6 +33719,10 @@
             <a:prstDash val="solid"/>
           </a:ln>
         </p:spPr>
+        <p:txBody>
+          <a:bodyPr/>
+          <a:p/>
+        </p:txBody>
       </p:sp>
       <p:sp>
         <p:nvSpPr>
@@ -32368,6 +33828,10 @@
             <a:prstDash val="solid"/>
           </a:ln>
         </p:spPr>
+        <p:txBody>
+          <a:bodyPr/>
+          <a:p/>
+        </p:txBody>
       </p:sp>
       <p:sp>
         <p:nvSpPr>
@@ -32393,6 +33857,10 @@
             <a:prstDash val="solid"/>
           </a:ln>
         </p:spPr>
+        <p:txBody>
+          <a:bodyPr/>
+          <a:p/>
+        </p:txBody>
       </p:sp>
       <p:sp>
         <p:nvSpPr>
@@ -32498,6 +33966,10 @@
             <a:prstDash val="solid"/>
           </a:ln>
         </p:spPr>
+        <p:txBody>
+          <a:bodyPr/>
+          <a:p/>
+        </p:txBody>
       </p:sp>
       <p:sp>
         <p:nvSpPr>
@@ -32523,6 +33995,10 @@
             <a:prstDash val="solid"/>
           </a:ln>
         </p:spPr>
+        <p:txBody>
+          <a:bodyPr/>
+          <a:p/>
+        </p:txBody>
       </p:sp>
       <p:sp>
         <p:nvSpPr>
@@ -32628,6 +34104,10 @@
             <a:prstDash val="solid"/>
           </a:ln>
         </p:spPr>
+        <p:txBody>
+          <a:bodyPr/>
+          <a:p/>
+        </p:txBody>
       </p:sp>
       <p:sp>
         <p:nvSpPr>
@@ -32653,6 +34133,10 @@
             <a:prstDash val="solid"/>
           </a:ln>
         </p:spPr>
+        <p:txBody>
+          <a:bodyPr/>
+          <a:p/>
+        </p:txBody>
       </p:sp>
       <p:sp>
         <p:nvSpPr>
@@ -32758,6 +34242,10 @@
             <a:prstDash val="solid"/>
           </a:ln>
         </p:spPr>
+        <p:txBody>
+          <a:bodyPr/>
+          <a:p/>
+        </p:txBody>
       </p:sp>
       <p:sp>
         <p:nvSpPr>
@@ -32783,6 +34271,10 @@
             <a:prstDash val="solid"/>
           </a:ln>
         </p:spPr>
+        <p:txBody>
+          <a:bodyPr/>
+          <a:p/>
+        </p:txBody>
       </p:sp>
       <p:sp>
         <p:nvSpPr>
@@ -32998,6 +34490,10 @@
             <a:prstDash val="solid"/>
           </a:ln>
         </p:spPr>
+        <p:txBody>
+          <a:bodyPr/>
+          <a:p/>
+        </p:txBody>
       </p:sp>
       <p:sp>
         <p:nvSpPr>
@@ -33023,6 +34519,10 @@
             <a:prstDash val="solid"/>
           </a:ln>
         </p:spPr>
+        <p:txBody>
+          <a:bodyPr/>
+          <a:p/>
+        </p:txBody>
       </p:sp>
       <p:sp>
         <p:nvSpPr>
@@ -33216,6 +34716,10 @@
             <a:prstDash val="solid"/>
           </a:ln>
         </p:spPr>
+        <p:txBody>
+          <a:bodyPr/>
+          <a:p/>
+        </p:txBody>
       </p:sp>
       <p:sp>
         <p:nvSpPr>
@@ -33241,6 +34745,10 @@
             <a:prstDash val="solid"/>
           </a:ln>
         </p:spPr>
+        <p:txBody>
+          <a:bodyPr/>
+          <a:p/>
+        </p:txBody>
       </p:sp>
       <p:sp>
         <p:nvSpPr>
